--- a/assets/figures-editable/appendix-studies/a-e09.pptx
+++ b/assets/figures-editable/appendix-studies/a-e09.pptx
@@ -7,7 +7,7 @@
   <p:sldIdLst>
     <p:sldId id="256" r:id="rId7"/>
   </p:sldIdLst>
-  <p:sldSz cx="8961120" cy="5660136" type="screen4x3"/>
+  <p:sldSz cx="12191695" cy="6858000" type="screen4x3"/>
   <p:notesSz cx="6858000" cy="9144000"/>
   <p:defaultTextStyle>
     <a:defPPr>
@@ -3098,14 +3098,14 @@
       <p:grpSpPr/>
       <p:sp>
         <p:nvSpPr>
-          <p:cNvPr id="2" name="text 0" descr="sci-ppt:obj-000"/>
+          <p:cNvPr id="2" name="A-E09 text 0" descr="sci-ppt:o000"/>
           <p:cNvSpPr txBox="1"/>
           <p:nvPr/>
         </p:nvSpPr>
         <p:spPr>
           <a:xfrm>
-            <a:off x="256032" y="137160"/>
-            <a:ext cx="7315200" cy="310896"/>
+            <a:off x="274320" y="118872"/>
+            <a:ext cx="11612880" cy="340105"/>
           </a:xfrm>
           <a:prstGeom prst="rect">
             <a:avLst/>
@@ -3114,7 +3114,7 @@
           <a:effectLst/>
         </p:spPr>
         <p:txBody>
-          <a:bodyPr wrap="none" lIns="0" rIns="0" tIns="0" bIns="0" anchor="ctr">
+          <a:bodyPr wrap="none" lIns="18288" rIns="18288" tIns="18288" bIns="18288" anchor="t">
             <a:spAutoFit/>
           </a:bodyPr>
           <a:lstStyle/>
@@ -3125,67 +3125,2295 @@
               </a:spcAft>
             </a:pPr>
             <a:r>
-              <a:rPr sz="1439" b="0" i="0">
+              <a:rPr sz="1900" b="1" i="0">
                 <a:solidFill>
                   <a:srgbClr val="8EDBD4"/>
                 </a:solidFill>
                 <a:latin typeface="Arial"/>
               </a:rPr>
-              <a:t>A-E09 · Physical variable map</a:t>
-            </a:r>
-          </a:p>
-        </p:txBody>
-      </p:sp>
-      <p:sp>
-        <p:nvSpPr>
-          <p:cNvPr id="3" name="ellipse 1" descr="sci-ppt:obj-001"/>
-          <p:cNvSpPr/>
+              <a:t>A-E09 · Kelvin–Voigt closure and exact radial kinematics</a:t>
+            </a:r>
+          </a:p>
+        </p:txBody>
+      </p:sp>
+      <p:cxnSp>
+        <p:nvCxnSpPr>
+          <p:cNvPr id="3" name="A-E09 line 1" descr="sci-ppt:o001"/>
+          <p:cNvCxnSpPr/>
           <p:nvPr/>
-        </p:nvSpPr>
-        <p:spPr>
-          <a:xfrm>
-            <a:off x="1060704" y="914400"/>
-            <a:ext cx="1463040" cy="1463040"/>
-          </a:xfrm>
-          <a:prstGeom prst="ellipse">
+        </p:nvCxnSpPr>
+        <p:spPr>
+          <a:xfrm>
+            <a:off x="914400" y="5029200"/>
+            <a:ext cx="5486400" cy="0"/>
+          </a:xfrm>
+          <a:prstGeom prst="line">
             <a:avLst/>
           </a:prstGeom>
-          <a:noFill/>
-          <a:ln w="17780">
+          <a:ln w="19050">
             <a:solidFill>
               <a:srgbClr val="B4C7D2"/>
             </a:solidFill>
           </a:ln>
           <a:effectLst/>
         </p:spPr>
-        <p:txBody>
-          <a:bodyPr rtlCol="0" anchor="ctr"/>
-          <a:lstStyle/>
-          <a:p>
-            <a:pPr algn="ctr"/>
-          </a:p>
-        </p:txBody>
-      </p:sp>
-      <p:sp>
-        <p:nvSpPr>
-          <p:cNvPr id="4" name="ellipse 2" descr="sci-ppt:obj-002"/>
+      </p:cxnSp>
+      <p:cxnSp>
+        <p:nvCxnSpPr>
+          <p:cNvPr id="4" name="A-E09 line 2" descr="sci-ppt:o002"/>
+          <p:cNvCxnSpPr/>
+          <p:nvPr/>
+        </p:nvCxnSpPr>
+        <p:spPr>
+          <a:xfrm>
+            <a:off x="914400" y="1371600"/>
+            <a:ext cx="0" cy="3657600"/>
+          </a:xfrm>
+          <a:prstGeom prst="line">
+            <a:avLst/>
+          </a:prstGeom>
+          <a:ln w="19050">
+            <a:solidFill>
+              <a:srgbClr val="B4C7D2"/>
+            </a:solidFill>
+          </a:ln>
+          <a:effectLst/>
+        </p:spPr>
+      </p:cxnSp>
+      <p:cxnSp>
+        <p:nvCxnSpPr>
+          <p:cNvPr id="5" name="A-E09 line 3" descr="sci-ppt:o003"/>
+          <p:cNvCxnSpPr/>
+          <p:nvPr/>
+        </p:nvCxnSpPr>
+        <p:spPr>
+          <a:xfrm>
+            <a:off x="914400" y="5029200"/>
+            <a:ext cx="0" cy="64008"/>
+          </a:xfrm>
+          <a:prstGeom prst="line">
+            <a:avLst/>
+          </a:prstGeom>
+          <a:ln w="12700">
+            <a:solidFill>
+              <a:srgbClr val="B4C7D2"/>
+            </a:solidFill>
+          </a:ln>
+          <a:effectLst/>
+        </p:spPr>
+      </p:cxnSp>
+      <p:cxnSp>
+        <p:nvCxnSpPr>
+          <p:cNvPr id="6" name="A-E09 line 4" descr="sci-ppt:o004"/>
+          <p:cNvCxnSpPr/>
+          <p:nvPr/>
+        </p:nvCxnSpPr>
+        <p:spPr>
+          <a:xfrm>
+            <a:off x="914400" y="1371600"/>
+            <a:ext cx="0" cy="3657600"/>
+          </a:xfrm>
+          <a:prstGeom prst="line">
+            <a:avLst/>
+          </a:prstGeom>
+          <a:ln w="7620">
+            <a:solidFill>
+              <a:srgbClr val="2E4756"/>
+            </a:solidFill>
+          </a:ln>
+          <a:effectLst/>
+        </p:spPr>
+      </p:cxnSp>
+      <p:sp>
+        <p:nvSpPr>
+          <p:cNvPr id="7" name="A-E09 text 5" descr="sci-ppt:o005"/>
+          <p:cNvSpPr txBox="1"/>
+          <p:nvPr/>
+        </p:nvSpPr>
+        <p:spPr>
+          <a:xfrm>
+            <a:off x="457200" y="5111496"/>
+            <a:ext cx="914400" cy="208407"/>
+          </a:xfrm>
+          <a:prstGeom prst="rect">
+            <a:avLst/>
+          </a:prstGeom>
+          <a:noFill/>
+          <a:effectLst/>
+        </p:spPr>
+        <p:txBody>
+          <a:bodyPr wrap="none" lIns="18288" rIns="18288" tIns="18288" bIns="18288" anchor="t">
+            <a:spAutoFit/>
+          </a:bodyPr>
+          <a:lstStyle/>
+          <a:p>
+            <a:pPr algn="ctr">
+              <a:spcAft>
+                <a:spcPts val="0"/>
+              </a:spcAft>
+            </a:pPr>
+            <a:r>
+              <a:rPr sz="1050" b="0" i="0">
+                <a:solidFill>
+                  <a:srgbClr val="B4C7D2"/>
+                </a:solidFill>
+                <a:latin typeface="Arial"/>
+              </a:rPr>
+              <a:t>1</a:t>
+            </a:r>
+          </a:p>
+        </p:txBody>
+      </p:sp>
+      <p:cxnSp>
+        <p:nvCxnSpPr>
+          <p:cNvPr id="8" name="A-E09 line 6" descr="sci-ppt:o006"/>
+          <p:cNvCxnSpPr/>
+          <p:nvPr/>
+        </p:nvCxnSpPr>
+        <p:spPr>
+          <a:xfrm>
+            <a:off x="2286000" y="5029200"/>
+            <a:ext cx="0" cy="64008"/>
+          </a:xfrm>
+          <a:prstGeom prst="line">
+            <a:avLst/>
+          </a:prstGeom>
+          <a:ln w="12700">
+            <a:solidFill>
+              <a:srgbClr val="B4C7D2"/>
+            </a:solidFill>
+          </a:ln>
+          <a:effectLst/>
+        </p:spPr>
+      </p:cxnSp>
+      <p:cxnSp>
+        <p:nvCxnSpPr>
+          <p:cNvPr id="9" name="A-E09 line 7" descr="sci-ppt:o007"/>
+          <p:cNvCxnSpPr/>
+          <p:nvPr/>
+        </p:nvCxnSpPr>
+        <p:spPr>
+          <a:xfrm>
+            <a:off x="2286000" y="1371600"/>
+            <a:ext cx="0" cy="3657600"/>
+          </a:xfrm>
+          <a:prstGeom prst="line">
+            <a:avLst/>
+          </a:prstGeom>
+          <a:ln w="7620">
+            <a:solidFill>
+              <a:srgbClr val="2E4756"/>
+            </a:solidFill>
+          </a:ln>
+          <a:effectLst/>
+        </p:spPr>
+      </p:cxnSp>
+      <p:sp>
+        <p:nvSpPr>
+          <p:cNvPr id="10" name="A-E09 text 8" descr="sci-ppt:o008"/>
+          <p:cNvSpPr txBox="1"/>
+          <p:nvPr/>
+        </p:nvSpPr>
+        <p:spPr>
+          <a:xfrm>
+            <a:off x="1828800" y="5111496"/>
+            <a:ext cx="914400" cy="208407"/>
+          </a:xfrm>
+          <a:prstGeom prst="rect">
+            <a:avLst/>
+          </a:prstGeom>
+          <a:noFill/>
+          <a:effectLst/>
+        </p:spPr>
+        <p:txBody>
+          <a:bodyPr wrap="none" lIns="18288" rIns="18288" tIns="18288" bIns="18288" anchor="t">
+            <a:spAutoFit/>
+          </a:bodyPr>
+          <a:lstStyle/>
+          <a:p>
+            <a:pPr algn="ctr">
+              <a:spcAft>
+                <a:spcPts val="0"/>
+              </a:spcAft>
+            </a:pPr>
+            <a:r>
+              <a:rPr sz="1050" b="0" i="0">
+                <a:solidFill>
+                  <a:srgbClr val="B4C7D2"/>
+                </a:solidFill>
+                <a:latin typeface="Arial"/>
+              </a:rPr>
+              <a:t>2</a:t>
+            </a:r>
+          </a:p>
+        </p:txBody>
+      </p:sp>
+      <p:cxnSp>
+        <p:nvCxnSpPr>
+          <p:cNvPr id="11" name="A-E09 line 9" descr="sci-ppt:o009"/>
+          <p:cNvCxnSpPr/>
+          <p:nvPr/>
+        </p:nvCxnSpPr>
+        <p:spPr>
+          <a:xfrm>
+            <a:off x="3657600" y="5029200"/>
+            <a:ext cx="0" cy="64008"/>
+          </a:xfrm>
+          <a:prstGeom prst="line">
+            <a:avLst/>
+          </a:prstGeom>
+          <a:ln w="12700">
+            <a:solidFill>
+              <a:srgbClr val="B4C7D2"/>
+            </a:solidFill>
+          </a:ln>
+          <a:effectLst/>
+        </p:spPr>
+      </p:cxnSp>
+      <p:cxnSp>
+        <p:nvCxnSpPr>
+          <p:cNvPr id="12" name="A-E09 line 10" descr="sci-ppt:o010"/>
+          <p:cNvCxnSpPr/>
+          <p:nvPr/>
+        </p:nvCxnSpPr>
+        <p:spPr>
+          <a:xfrm>
+            <a:off x="3657600" y="1371600"/>
+            <a:ext cx="0" cy="3657600"/>
+          </a:xfrm>
+          <a:prstGeom prst="line">
+            <a:avLst/>
+          </a:prstGeom>
+          <a:ln w="7620">
+            <a:solidFill>
+              <a:srgbClr val="2E4756"/>
+            </a:solidFill>
+          </a:ln>
+          <a:effectLst/>
+        </p:spPr>
+      </p:cxnSp>
+      <p:sp>
+        <p:nvSpPr>
+          <p:cNvPr id="13" name="A-E09 text 11" descr="sci-ppt:o011"/>
+          <p:cNvSpPr txBox="1"/>
+          <p:nvPr/>
+        </p:nvSpPr>
+        <p:spPr>
+          <a:xfrm>
+            <a:off x="3200400" y="5111496"/>
+            <a:ext cx="914400" cy="208407"/>
+          </a:xfrm>
+          <a:prstGeom prst="rect">
+            <a:avLst/>
+          </a:prstGeom>
+          <a:noFill/>
+          <a:effectLst/>
+        </p:spPr>
+        <p:txBody>
+          <a:bodyPr wrap="none" lIns="18288" rIns="18288" tIns="18288" bIns="18288" anchor="t">
+            <a:spAutoFit/>
+          </a:bodyPr>
+          <a:lstStyle/>
+          <a:p>
+            <a:pPr algn="ctr">
+              <a:spcAft>
+                <a:spcPts val="0"/>
+              </a:spcAft>
+            </a:pPr>
+            <a:r>
+              <a:rPr sz="1050" b="0" i="0">
+                <a:solidFill>
+                  <a:srgbClr val="B4C7D2"/>
+                </a:solidFill>
+                <a:latin typeface="Arial"/>
+              </a:rPr>
+              <a:t>3</a:t>
+            </a:r>
+          </a:p>
+        </p:txBody>
+      </p:sp>
+      <p:cxnSp>
+        <p:nvCxnSpPr>
+          <p:cNvPr id="14" name="A-E09 line 12" descr="sci-ppt:o012"/>
+          <p:cNvCxnSpPr/>
+          <p:nvPr/>
+        </p:nvCxnSpPr>
+        <p:spPr>
+          <a:xfrm>
+            <a:off x="5029200" y="5029200"/>
+            <a:ext cx="0" cy="64008"/>
+          </a:xfrm>
+          <a:prstGeom prst="line">
+            <a:avLst/>
+          </a:prstGeom>
+          <a:ln w="12700">
+            <a:solidFill>
+              <a:srgbClr val="B4C7D2"/>
+            </a:solidFill>
+          </a:ln>
+          <a:effectLst/>
+        </p:spPr>
+      </p:cxnSp>
+      <p:cxnSp>
+        <p:nvCxnSpPr>
+          <p:cNvPr id="15" name="A-E09 line 13" descr="sci-ppt:o013"/>
+          <p:cNvCxnSpPr/>
+          <p:nvPr/>
+        </p:nvCxnSpPr>
+        <p:spPr>
+          <a:xfrm>
+            <a:off x="5029200" y="1371600"/>
+            <a:ext cx="0" cy="3657600"/>
+          </a:xfrm>
+          <a:prstGeom prst="line">
+            <a:avLst/>
+          </a:prstGeom>
+          <a:ln w="7620">
+            <a:solidFill>
+              <a:srgbClr val="2E4756"/>
+            </a:solidFill>
+          </a:ln>
+          <a:effectLst/>
+        </p:spPr>
+      </p:cxnSp>
+      <p:sp>
+        <p:nvSpPr>
+          <p:cNvPr id="16" name="A-E09 text 14" descr="sci-ppt:o014"/>
+          <p:cNvSpPr txBox="1"/>
+          <p:nvPr/>
+        </p:nvSpPr>
+        <p:spPr>
+          <a:xfrm>
+            <a:off x="4572000" y="5111496"/>
+            <a:ext cx="914400" cy="208407"/>
+          </a:xfrm>
+          <a:prstGeom prst="rect">
+            <a:avLst/>
+          </a:prstGeom>
+          <a:noFill/>
+          <a:effectLst/>
+        </p:spPr>
+        <p:txBody>
+          <a:bodyPr wrap="none" lIns="18288" rIns="18288" tIns="18288" bIns="18288" anchor="t">
+            <a:spAutoFit/>
+          </a:bodyPr>
+          <a:lstStyle/>
+          <a:p>
+            <a:pPr algn="ctr">
+              <a:spcAft>
+                <a:spcPts val="0"/>
+              </a:spcAft>
+            </a:pPr>
+            <a:r>
+              <a:rPr sz="1050" b="0" i="0">
+                <a:solidFill>
+                  <a:srgbClr val="B4C7D2"/>
+                </a:solidFill>
+                <a:latin typeface="Arial"/>
+              </a:rPr>
+              <a:t>4</a:t>
+            </a:r>
+          </a:p>
+        </p:txBody>
+      </p:sp>
+      <p:cxnSp>
+        <p:nvCxnSpPr>
+          <p:cNvPr id="17" name="A-E09 line 15" descr="sci-ppt:o015"/>
+          <p:cNvCxnSpPr/>
+          <p:nvPr/>
+        </p:nvCxnSpPr>
+        <p:spPr>
+          <a:xfrm>
+            <a:off x="6400800" y="5029200"/>
+            <a:ext cx="0" cy="64008"/>
+          </a:xfrm>
+          <a:prstGeom prst="line">
+            <a:avLst/>
+          </a:prstGeom>
+          <a:ln w="12700">
+            <a:solidFill>
+              <a:srgbClr val="B4C7D2"/>
+            </a:solidFill>
+          </a:ln>
+          <a:effectLst/>
+        </p:spPr>
+      </p:cxnSp>
+      <p:cxnSp>
+        <p:nvCxnSpPr>
+          <p:cNvPr id="18" name="A-E09 line 16" descr="sci-ppt:o016"/>
+          <p:cNvCxnSpPr/>
+          <p:nvPr/>
+        </p:nvCxnSpPr>
+        <p:spPr>
+          <a:xfrm>
+            <a:off x="6400800" y="1371600"/>
+            <a:ext cx="0" cy="3657600"/>
+          </a:xfrm>
+          <a:prstGeom prst="line">
+            <a:avLst/>
+          </a:prstGeom>
+          <a:ln w="7620">
+            <a:solidFill>
+              <a:srgbClr val="2E4756"/>
+            </a:solidFill>
+          </a:ln>
+          <a:effectLst/>
+        </p:spPr>
+      </p:cxnSp>
+      <p:sp>
+        <p:nvSpPr>
+          <p:cNvPr id="19" name="A-E09 text 17" descr="sci-ppt:o017"/>
+          <p:cNvSpPr txBox="1"/>
+          <p:nvPr/>
+        </p:nvSpPr>
+        <p:spPr>
+          <a:xfrm>
+            <a:off x="5943600" y="5111496"/>
+            <a:ext cx="914400" cy="208407"/>
+          </a:xfrm>
+          <a:prstGeom prst="rect">
+            <a:avLst/>
+          </a:prstGeom>
+          <a:noFill/>
+          <a:effectLst/>
+        </p:spPr>
+        <p:txBody>
+          <a:bodyPr wrap="none" lIns="18288" rIns="18288" tIns="18288" bIns="18288" anchor="t">
+            <a:spAutoFit/>
+          </a:bodyPr>
+          <a:lstStyle/>
+          <a:p>
+            <a:pPr algn="ctr">
+              <a:spcAft>
+                <a:spcPts val="0"/>
+              </a:spcAft>
+            </a:pPr>
+            <a:r>
+              <a:rPr sz="1050" b="0" i="0">
+                <a:solidFill>
+                  <a:srgbClr val="B4C7D2"/>
+                </a:solidFill>
+                <a:latin typeface="Arial"/>
+              </a:rPr>
+              <a:t>5</a:t>
+            </a:r>
+          </a:p>
+        </p:txBody>
+      </p:sp>
+      <p:cxnSp>
+        <p:nvCxnSpPr>
+          <p:cNvPr id="20" name="A-E09 line 18" descr="sci-ppt:o018"/>
+          <p:cNvCxnSpPr/>
+          <p:nvPr/>
+        </p:nvCxnSpPr>
+        <p:spPr>
+          <a:xfrm>
+            <a:off x="850392" y="4814047"/>
+            <a:ext cx="64008" cy="0"/>
+          </a:xfrm>
+          <a:prstGeom prst="line">
+            <a:avLst/>
+          </a:prstGeom>
+          <a:ln w="12700">
+            <a:solidFill>
+              <a:srgbClr val="B4C7D2"/>
+            </a:solidFill>
+          </a:ln>
+          <a:effectLst/>
+        </p:spPr>
+      </p:cxnSp>
+      <p:cxnSp>
+        <p:nvCxnSpPr>
+          <p:cNvPr id="21" name="A-E09 line 19" descr="sci-ppt:o019"/>
+          <p:cNvCxnSpPr/>
+          <p:nvPr/>
+        </p:nvCxnSpPr>
+        <p:spPr>
+          <a:xfrm>
+            <a:off x="914400" y="4814047"/>
+            <a:ext cx="5486400" cy="0"/>
+          </a:xfrm>
+          <a:prstGeom prst="line">
+            <a:avLst/>
+          </a:prstGeom>
+          <a:ln w="7620">
+            <a:solidFill>
+              <a:srgbClr val="2E4756"/>
+            </a:solidFill>
+          </a:ln>
+          <a:effectLst/>
+        </p:spPr>
+      </p:cxnSp>
+      <p:sp>
+        <p:nvSpPr>
+          <p:cNvPr id="22" name="A-E09 text 20" descr="sci-ppt:o020"/>
+          <p:cNvSpPr txBox="1"/>
+          <p:nvPr/>
+        </p:nvSpPr>
+        <p:spPr>
+          <a:xfrm>
+            <a:off x="45720" y="4731751"/>
+            <a:ext cx="777240" cy="208407"/>
+          </a:xfrm>
+          <a:prstGeom prst="rect">
+            <a:avLst/>
+          </a:prstGeom>
+          <a:noFill/>
+          <a:effectLst/>
+        </p:spPr>
+        <p:txBody>
+          <a:bodyPr wrap="none" lIns="18288" rIns="18288" tIns="18288" bIns="18288" anchor="t">
+            <a:spAutoFit/>
+          </a:bodyPr>
+          <a:lstStyle/>
+          <a:p>
+            <a:pPr algn="r">
+              <a:spcAft>
+                <a:spcPts val="0"/>
+              </a:spcAft>
+            </a:pPr>
+            <a:r>
+              <a:rPr sz="1050" b="0" i="0">
+                <a:solidFill>
+                  <a:srgbClr val="B4C7D2"/>
+                </a:solidFill>
+                <a:latin typeface="Arial"/>
+              </a:rPr>
+              <a:t>-2</a:t>
+            </a:r>
+          </a:p>
+        </p:txBody>
+      </p:sp>
+      <p:cxnSp>
+        <p:nvCxnSpPr>
+          <p:cNvPr id="23" name="A-E09 line 21" descr="sci-ppt:o021"/>
+          <p:cNvCxnSpPr/>
+          <p:nvPr/>
+        </p:nvCxnSpPr>
+        <p:spPr>
+          <a:xfrm>
+            <a:off x="850392" y="3738282"/>
+            <a:ext cx="64008" cy="0"/>
+          </a:xfrm>
+          <a:prstGeom prst="line">
+            <a:avLst/>
+          </a:prstGeom>
+          <a:ln w="12700">
+            <a:solidFill>
+              <a:srgbClr val="B4C7D2"/>
+            </a:solidFill>
+          </a:ln>
+          <a:effectLst/>
+        </p:spPr>
+      </p:cxnSp>
+      <p:cxnSp>
+        <p:nvCxnSpPr>
+          <p:cNvPr id="24" name="A-E09 line 22" descr="sci-ppt:o022"/>
+          <p:cNvCxnSpPr/>
+          <p:nvPr/>
+        </p:nvCxnSpPr>
+        <p:spPr>
+          <a:xfrm>
+            <a:off x="914400" y="3738282"/>
+            <a:ext cx="5486400" cy="0"/>
+          </a:xfrm>
+          <a:prstGeom prst="line">
+            <a:avLst/>
+          </a:prstGeom>
+          <a:ln w="7620">
+            <a:solidFill>
+              <a:srgbClr val="2E4756"/>
+            </a:solidFill>
+          </a:ln>
+          <a:effectLst/>
+        </p:spPr>
+      </p:cxnSp>
+      <p:sp>
+        <p:nvSpPr>
+          <p:cNvPr id="25" name="A-E09 text 23" descr="sci-ppt:o023"/>
+          <p:cNvSpPr txBox="1"/>
+          <p:nvPr/>
+        </p:nvSpPr>
+        <p:spPr>
+          <a:xfrm>
+            <a:off x="45720" y="3655986"/>
+            <a:ext cx="777240" cy="208407"/>
+          </a:xfrm>
+          <a:prstGeom prst="rect">
+            <a:avLst/>
+          </a:prstGeom>
+          <a:noFill/>
+          <a:effectLst/>
+        </p:spPr>
+        <p:txBody>
+          <a:bodyPr wrap="none" lIns="18288" rIns="18288" tIns="18288" bIns="18288" anchor="t">
+            <a:spAutoFit/>
+          </a:bodyPr>
+          <a:lstStyle/>
+          <a:p>
+            <a:pPr algn="r">
+              <a:spcAft>
+                <a:spcPts val="0"/>
+              </a:spcAft>
+            </a:pPr>
+            <a:r>
+              <a:rPr sz="1050" b="0" i="0">
+                <a:solidFill>
+                  <a:srgbClr val="B4C7D2"/>
+                </a:solidFill>
+                <a:latin typeface="Arial"/>
+              </a:rPr>
+              <a:t>-1</a:t>
+            </a:r>
+          </a:p>
+        </p:txBody>
+      </p:sp>
+      <p:cxnSp>
+        <p:nvCxnSpPr>
+          <p:cNvPr id="26" name="A-E09 line 24" descr="sci-ppt:o024"/>
+          <p:cNvCxnSpPr/>
+          <p:nvPr/>
+        </p:nvCxnSpPr>
+        <p:spPr>
+          <a:xfrm>
+            <a:off x="850392" y="2662517"/>
+            <a:ext cx="64008" cy="0"/>
+          </a:xfrm>
+          <a:prstGeom prst="line">
+            <a:avLst/>
+          </a:prstGeom>
+          <a:ln w="12700">
+            <a:solidFill>
+              <a:srgbClr val="B4C7D2"/>
+            </a:solidFill>
+          </a:ln>
+          <a:effectLst/>
+        </p:spPr>
+      </p:cxnSp>
+      <p:cxnSp>
+        <p:nvCxnSpPr>
+          <p:cNvPr id="27" name="A-E09 line 25" descr="sci-ppt:o025"/>
+          <p:cNvCxnSpPr/>
+          <p:nvPr/>
+        </p:nvCxnSpPr>
+        <p:spPr>
+          <a:xfrm>
+            <a:off x="914400" y="2662517"/>
+            <a:ext cx="5486400" cy="0"/>
+          </a:xfrm>
+          <a:prstGeom prst="line">
+            <a:avLst/>
+          </a:prstGeom>
+          <a:ln w="7620">
+            <a:solidFill>
+              <a:srgbClr val="2E4756"/>
+            </a:solidFill>
+          </a:ln>
+          <a:effectLst/>
+        </p:spPr>
+      </p:cxnSp>
+      <p:sp>
+        <p:nvSpPr>
+          <p:cNvPr id="28" name="A-E09 text 26" descr="sci-ppt:o026"/>
+          <p:cNvSpPr txBox="1"/>
+          <p:nvPr/>
+        </p:nvSpPr>
+        <p:spPr>
+          <a:xfrm>
+            <a:off x="45720" y="2580221"/>
+            <a:ext cx="777240" cy="208407"/>
+          </a:xfrm>
+          <a:prstGeom prst="rect">
+            <a:avLst/>
+          </a:prstGeom>
+          <a:noFill/>
+          <a:effectLst/>
+        </p:spPr>
+        <p:txBody>
+          <a:bodyPr wrap="none" lIns="18288" rIns="18288" tIns="18288" bIns="18288" anchor="t">
+            <a:spAutoFit/>
+          </a:bodyPr>
+          <a:lstStyle/>
+          <a:p>
+            <a:pPr algn="r">
+              <a:spcAft>
+                <a:spcPts val="0"/>
+              </a:spcAft>
+            </a:pPr>
+            <a:r>
+              <a:rPr sz="1050" b="0" i="0">
+                <a:solidFill>
+                  <a:srgbClr val="B4C7D2"/>
+                </a:solidFill>
+                <a:latin typeface="Arial"/>
+              </a:rPr>
+              <a:t>0</a:t>
+            </a:r>
+          </a:p>
+        </p:txBody>
+      </p:sp>
+      <p:cxnSp>
+        <p:nvCxnSpPr>
+          <p:cNvPr id="29" name="A-E09 line 27" descr="sci-ppt:o027"/>
+          <p:cNvCxnSpPr/>
+          <p:nvPr/>
+        </p:nvCxnSpPr>
+        <p:spPr>
+          <a:xfrm>
+            <a:off x="850392" y="1586752"/>
+            <a:ext cx="64008" cy="0"/>
+          </a:xfrm>
+          <a:prstGeom prst="line">
+            <a:avLst/>
+          </a:prstGeom>
+          <a:ln w="12700">
+            <a:solidFill>
+              <a:srgbClr val="B4C7D2"/>
+            </a:solidFill>
+          </a:ln>
+          <a:effectLst/>
+        </p:spPr>
+      </p:cxnSp>
+      <p:cxnSp>
+        <p:nvCxnSpPr>
+          <p:cNvPr id="30" name="A-E09 line 28" descr="sci-ppt:o028"/>
+          <p:cNvCxnSpPr/>
+          <p:nvPr/>
+        </p:nvCxnSpPr>
+        <p:spPr>
+          <a:xfrm>
+            <a:off x="914400" y="1586752"/>
+            <a:ext cx="5486400" cy="0"/>
+          </a:xfrm>
+          <a:prstGeom prst="line">
+            <a:avLst/>
+          </a:prstGeom>
+          <a:ln w="7620">
+            <a:solidFill>
+              <a:srgbClr val="2E4756"/>
+            </a:solidFill>
+          </a:ln>
+          <a:effectLst/>
+        </p:spPr>
+      </p:cxnSp>
+      <p:sp>
+        <p:nvSpPr>
+          <p:cNvPr id="31" name="A-E09 text 29" descr="sci-ppt:o029"/>
+          <p:cNvSpPr txBox="1"/>
+          <p:nvPr/>
+        </p:nvSpPr>
+        <p:spPr>
+          <a:xfrm>
+            <a:off x="45720" y="1504456"/>
+            <a:ext cx="777240" cy="208407"/>
+          </a:xfrm>
+          <a:prstGeom prst="rect">
+            <a:avLst/>
+          </a:prstGeom>
+          <a:noFill/>
+          <a:effectLst/>
+        </p:spPr>
+        <p:txBody>
+          <a:bodyPr wrap="none" lIns="18288" rIns="18288" tIns="18288" bIns="18288" anchor="t">
+            <a:spAutoFit/>
+          </a:bodyPr>
+          <a:lstStyle/>
+          <a:p>
+            <a:pPr algn="r">
+              <a:spcAft>
+                <a:spcPts val="0"/>
+              </a:spcAft>
+            </a:pPr>
+            <a:r>
+              <a:rPr sz="1050" b="0" i="0">
+                <a:solidFill>
+                  <a:srgbClr val="B4C7D2"/>
+                </a:solidFill>
+                <a:latin typeface="Arial"/>
+              </a:rPr>
+              <a:t>1</a:t>
+            </a:r>
+          </a:p>
+        </p:txBody>
+      </p:sp>
+      <p:sp>
+        <p:nvSpPr>
+          <p:cNvPr id="32" name="A-E09 text 30" descr="sci-ppt:o030"/>
+          <p:cNvSpPr txBox="1"/>
+          <p:nvPr/>
+        </p:nvSpPr>
+        <p:spPr>
+          <a:xfrm>
+            <a:off x="914400" y="5312664"/>
+            <a:ext cx="5486400" cy="231648"/>
+          </a:xfrm>
+          <a:prstGeom prst="rect">
+            <a:avLst/>
+          </a:prstGeom>
+          <a:noFill/>
+          <a:effectLst/>
+        </p:spPr>
+        <p:txBody>
+          <a:bodyPr wrap="none" lIns="18288" rIns="18288" tIns="18288" bIns="18288" anchor="t">
+            <a:spAutoFit/>
+          </a:bodyPr>
+          <a:lstStyle/>
+          <a:p>
+            <a:pPr algn="ctr">
+              <a:spcAft>
+                <a:spcPts val="0"/>
+              </a:spcAft>
+            </a:pPr>
+            <a:r>
+              <a:rPr sz="1200" b="0" i="0">
+                <a:solidFill>
+                  <a:srgbClr val="E7F0F3"/>
+                </a:solidFill>
+                <a:latin typeface="Arial"/>
+              </a:rPr>
+              <a:t>r / R</a:t>
+            </a:r>
+          </a:p>
+        </p:txBody>
+      </p:sp>
+      <p:sp>
+        <p:nvSpPr>
+          <p:cNvPr id="33" name="A-E09 text 31" descr="sci-ppt:o031"/>
+          <p:cNvSpPr txBox="1"/>
+          <p:nvPr/>
+        </p:nvSpPr>
+        <p:spPr>
+          <a:xfrm>
+            <a:off x="365760" y="1024128"/>
+            <a:ext cx="5486400" cy="231648"/>
+          </a:xfrm>
+          <a:prstGeom prst="rect">
+            <a:avLst/>
+          </a:prstGeom>
+          <a:noFill/>
+          <a:effectLst/>
+        </p:spPr>
+        <p:txBody>
+          <a:bodyPr wrap="none" lIns="18288" rIns="18288" tIns="18288" bIns="18288" anchor="t">
+            <a:spAutoFit/>
+          </a:bodyPr>
+          <a:lstStyle/>
+          <a:p>
+            <a:pPr algn="l">
+              <a:spcAft>
+                <a:spcPts val="0"/>
+              </a:spcAft>
+            </a:pPr>
+            <a:r>
+              <a:rPr sz="1200" b="0" i="0">
+                <a:solidFill>
+                  <a:srgbClr val="E7F0F3"/>
+                </a:solidFill>
+                <a:latin typeface="Arial"/>
+              </a:rPr>
+              <a:t>strain rate  (units Ṙ / R)</a:t>
+            </a:r>
+          </a:p>
+        </p:txBody>
+      </p:sp>
+      <p:sp>
+        <p:nvSpPr>
+          <p:cNvPr id="34" name="A-E09 polygon 32" descr="sci-ppt:o032"/>
           <p:cNvSpPr/>
           <p:nvPr/>
         </p:nvSpPr>
         <p:spPr>
           <a:xfrm>
-            <a:off x="1463040" y="1316736"/>
-            <a:ext cx="658368" cy="658368"/>
-          </a:xfrm>
-          <a:prstGeom prst="ellipse">
+            <a:off x="914400" y="2679729"/>
+            <a:ext cx="5486400" cy="2134318"/>
+          </a:xfrm>
+          <a:custGeom>
+            <a:avLst/>
+            <a:gdLst/>
+            <a:ahLst/>
+            <a:cxnLst/>
+            <a:rect l="l" t="t" r="r" b="b"/>
+            <a:pathLst>
+              <a:path w="5486400" h="2134318">
+                <a:moveTo>
+                  <a:pt x="0" y="2134318"/>
+                </a:moveTo>
+                <a:lnTo>
+                  <a:pt x="27569" y="2009623"/>
+                </a:lnTo>
+                <a:lnTo>
+                  <a:pt x="55139" y="1894381"/>
+                </a:lnTo>
+                <a:lnTo>
+                  <a:pt x="82709" y="1787713"/>
+                </a:lnTo>
+                <a:lnTo>
+                  <a:pt x="110279" y="1688836"/>
+                </a:lnTo>
+                <a:lnTo>
+                  <a:pt x="137849" y="1597051"/>
+                </a:lnTo>
+                <a:lnTo>
+                  <a:pt x="165419" y="1511733"/>
+                </a:lnTo>
+                <a:lnTo>
+                  <a:pt x="192988" y="1432324"/>
+                </a:lnTo>
+                <a:lnTo>
+                  <a:pt x="220558" y="1358320"/>
+                </a:lnTo>
+                <a:lnTo>
+                  <a:pt x="248128" y="1289269"/>
+                </a:lnTo>
+                <a:lnTo>
+                  <a:pt x="275698" y="1224763"/>
+                </a:lnTo>
+                <a:lnTo>
+                  <a:pt x="303268" y="1164435"/>
+                </a:lnTo>
+                <a:lnTo>
+                  <a:pt x="330838" y="1107952"/>
+                </a:lnTo>
+                <a:lnTo>
+                  <a:pt x="358408" y="1055012"/>
+                </a:lnTo>
+                <a:lnTo>
+                  <a:pt x="385977" y="1005341"/>
+                </a:lnTo>
+                <a:lnTo>
+                  <a:pt x="413547" y="958692"/>
+                </a:lnTo>
+                <a:lnTo>
+                  <a:pt x="441117" y="914838"/>
+                </a:lnTo>
+                <a:lnTo>
+                  <a:pt x="468687" y="873573"/>
+                </a:lnTo>
+                <a:lnTo>
+                  <a:pt x="496257" y="834708"/>
+                </a:lnTo>
+                <a:lnTo>
+                  <a:pt x="523827" y="798071"/>
+                </a:lnTo>
+                <a:lnTo>
+                  <a:pt x="551396" y="763506"/>
+                </a:lnTo>
+                <a:lnTo>
+                  <a:pt x="578966" y="730867"/>
+                </a:lnTo>
+                <a:lnTo>
+                  <a:pt x="606536" y="700022"/>
+                </a:lnTo>
+                <a:lnTo>
+                  <a:pt x="634106" y="670850"/>
+                </a:lnTo>
+                <a:lnTo>
+                  <a:pt x="661676" y="643239"/>
+                </a:lnTo>
+                <a:lnTo>
+                  <a:pt x="689246" y="617086"/>
+                </a:lnTo>
+                <a:lnTo>
+                  <a:pt x="716816" y="592295"/>
+                </a:lnTo>
+                <a:lnTo>
+                  <a:pt x="744385" y="568780"/>
+                </a:lnTo>
+                <a:lnTo>
+                  <a:pt x="771955" y="546459"/>
+                </a:lnTo>
+                <a:lnTo>
+                  <a:pt x="799525" y="525257"/>
+                </a:lnTo>
+                <a:lnTo>
+                  <a:pt x="827095" y="505106"/>
+                </a:lnTo>
+                <a:lnTo>
+                  <a:pt x="854665" y="485940"/>
+                </a:lnTo>
+                <a:lnTo>
+                  <a:pt x="882235" y="467701"/>
+                </a:lnTo>
+                <a:lnTo>
+                  <a:pt x="909805" y="450332"/>
+                </a:lnTo>
+                <a:lnTo>
+                  <a:pt x="937374" y="433784"/>
+                </a:lnTo>
+                <a:lnTo>
+                  <a:pt x="964944" y="418007"/>
+                </a:lnTo>
+                <a:lnTo>
+                  <a:pt x="992514" y="402957"/>
+                </a:lnTo>
+                <a:lnTo>
+                  <a:pt x="1020084" y="388594"/>
+                </a:lnTo>
+                <a:lnTo>
+                  <a:pt x="1047654" y="374878"/>
+                </a:lnTo>
+                <a:lnTo>
+                  <a:pt x="1075224" y="361773"/>
+                </a:lnTo>
+                <a:lnTo>
+                  <a:pt x="1102793" y="349245"/>
+                </a:lnTo>
+                <a:lnTo>
+                  <a:pt x="1130363" y="337264"/>
+                </a:lnTo>
+                <a:lnTo>
+                  <a:pt x="1157933" y="325799"/>
+                </a:lnTo>
+                <a:lnTo>
+                  <a:pt x="1185503" y="314824"/>
+                </a:lnTo>
+                <a:lnTo>
+                  <a:pt x="1213073" y="304312"/>
+                </a:lnTo>
+                <a:lnTo>
+                  <a:pt x="1240643" y="294239"/>
+                </a:lnTo>
+                <a:lnTo>
+                  <a:pt x="1268213" y="284582"/>
+                </a:lnTo>
+                <a:lnTo>
+                  <a:pt x="1295782" y="275320"/>
+                </a:lnTo>
+                <a:lnTo>
+                  <a:pt x="1323352" y="266434"/>
+                </a:lnTo>
+                <a:lnTo>
+                  <a:pt x="1350922" y="257904"/>
+                </a:lnTo>
+                <a:lnTo>
+                  <a:pt x="1378492" y="249712"/>
+                </a:lnTo>
+                <a:lnTo>
+                  <a:pt x="1406062" y="241843"/>
+                </a:lnTo>
+                <a:lnTo>
+                  <a:pt x="1433632" y="234280"/>
+                </a:lnTo>
+                <a:lnTo>
+                  <a:pt x="1461202" y="227008"/>
+                </a:lnTo>
+                <a:lnTo>
+                  <a:pt x="1488771" y="220014"/>
+                </a:lnTo>
+                <a:lnTo>
+                  <a:pt x="1516341" y="213285"/>
+                </a:lnTo>
+                <a:lnTo>
+                  <a:pt x="1543911" y="206807"/>
+                </a:lnTo>
+                <a:lnTo>
+                  <a:pt x="1571481" y="200571"/>
+                </a:lnTo>
+                <a:lnTo>
+                  <a:pt x="1599051" y="194563"/>
+                </a:lnTo>
+                <a:lnTo>
+                  <a:pt x="1626621" y="188775"/>
+                </a:lnTo>
+                <a:lnTo>
+                  <a:pt x="1654190" y="183195"/>
+                </a:lnTo>
+                <a:lnTo>
+                  <a:pt x="1681760" y="177815"/>
+                </a:lnTo>
+                <a:lnTo>
+                  <a:pt x="1709330" y="172626"/>
+                </a:lnTo>
+                <a:lnTo>
+                  <a:pt x="1736900" y="167620"/>
+                </a:lnTo>
+                <a:lnTo>
+                  <a:pt x="1764470" y="162788"/>
+                </a:lnTo>
+                <a:lnTo>
+                  <a:pt x="1792040" y="158123"/>
+                </a:lnTo>
+                <a:lnTo>
+                  <a:pt x="1819610" y="153618"/>
+                </a:lnTo>
+                <a:lnTo>
+                  <a:pt x="1847179" y="149266"/>
+                </a:lnTo>
+                <a:lnTo>
+                  <a:pt x="1874749" y="145060"/>
+                </a:lnTo>
+                <a:lnTo>
+                  <a:pt x="1902319" y="140995"/>
+                </a:lnTo>
+                <a:lnTo>
+                  <a:pt x="1929889" y="137065"/>
+                </a:lnTo>
+                <a:lnTo>
+                  <a:pt x="1957459" y="133263"/>
+                </a:lnTo>
+                <a:lnTo>
+                  <a:pt x="1985029" y="129586"/>
+                </a:lnTo>
+                <a:lnTo>
+                  <a:pt x="2012598" y="126027"/>
+                </a:lnTo>
+                <a:lnTo>
+                  <a:pt x="2040168" y="122583"/>
+                </a:lnTo>
+                <a:lnTo>
+                  <a:pt x="2067738" y="119248"/>
+                </a:lnTo>
+                <a:lnTo>
+                  <a:pt x="2095308" y="116018"/>
+                </a:lnTo>
+                <a:lnTo>
+                  <a:pt x="2122878" y="112890"/>
+                </a:lnTo>
+                <a:lnTo>
+                  <a:pt x="2150448" y="109858"/>
+                </a:lnTo>
+                <a:lnTo>
+                  <a:pt x="2178018" y="106920"/>
+                </a:lnTo>
+                <a:lnTo>
+                  <a:pt x="2205587" y="104072"/>
+                </a:lnTo>
+                <a:lnTo>
+                  <a:pt x="2233157" y="101311"/>
+                </a:lnTo>
+                <a:lnTo>
+                  <a:pt x="2260727" y="98632"/>
+                </a:lnTo>
+                <a:lnTo>
+                  <a:pt x="2288297" y="96034"/>
+                </a:lnTo>
+                <a:lnTo>
+                  <a:pt x="2315867" y="93513"/>
+                </a:lnTo>
+                <a:lnTo>
+                  <a:pt x="2343437" y="91066"/>
+                </a:lnTo>
+                <a:lnTo>
+                  <a:pt x="2371007" y="88691"/>
+                </a:lnTo>
+                <a:lnTo>
+                  <a:pt x="2398576" y="86385"/>
+                </a:lnTo>
+                <a:lnTo>
+                  <a:pt x="2426146" y="84145"/>
+                </a:lnTo>
+                <a:lnTo>
+                  <a:pt x="2453716" y="81969"/>
+                </a:lnTo>
+                <a:lnTo>
+                  <a:pt x="2481286" y="79855"/>
+                </a:lnTo>
+                <a:lnTo>
+                  <a:pt x="2508856" y="77801"/>
+                </a:lnTo>
+                <a:lnTo>
+                  <a:pt x="2536426" y="75804"/>
+                </a:lnTo>
+                <a:lnTo>
+                  <a:pt x="2563995" y="73863"/>
+                </a:lnTo>
+                <a:lnTo>
+                  <a:pt x="2591565" y="71975"/>
+                </a:lnTo>
+                <a:lnTo>
+                  <a:pt x="2619135" y="70140"/>
+                </a:lnTo>
+                <a:lnTo>
+                  <a:pt x="2646705" y="68354"/>
+                </a:lnTo>
+                <a:lnTo>
+                  <a:pt x="2674275" y="66617"/>
+                </a:lnTo>
+                <a:lnTo>
+                  <a:pt x="2701845" y="64926"/>
+                </a:lnTo>
+                <a:lnTo>
+                  <a:pt x="2729415" y="63281"/>
+                </a:lnTo>
+                <a:lnTo>
+                  <a:pt x="2756984" y="61679"/>
+                </a:lnTo>
+                <a:lnTo>
+                  <a:pt x="2784554" y="60119"/>
+                </a:lnTo>
+                <a:lnTo>
+                  <a:pt x="2812124" y="58601"/>
+                </a:lnTo>
+                <a:lnTo>
+                  <a:pt x="2839694" y="57121"/>
+                </a:lnTo>
+                <a:lnTo>
+                  <a:pt x="2867264" y="55680"/>
+                </a:lnTo>
+                <a:lnTo>
+                  <a:pt x="2894834" y="54276"/>
+                </a:lnTo>
+                <a:lnTo>
+                  <a:pt x="2922404" y="52908"/>
+                </a:lnTo>
+                <a:lnTo>
+                  <a:pt x="2949973" y="51575"/>
+                </a:lnTo>
+                <a:lnTo>
+                  <a:pt x="2977543" y="50275"/>
+                </a:lnTo>
+                <a:lnTo>
+                  <a:pt x="3005113" y="49008"/>
+                </a:lnTo>
+                <a:lnTo>
+                  <a:pt x="3032683" y="47772"/>
+                </a:lnTo>
+                <a:lnTo>
+                  <a:pt x="3060253" y="46567"/>
+                </a:lnTo>
+                <a:lnTo>
+                  <a:pt x="3087823" y="45391"/>
+                </a:lnTo>
+                <a:lnTo>
+                  <a:pt x="3115392" y="44244"/>
+                </a:lnTo>
+                <a:lnTo>
+                  <a:pt x="3142962" y="43125"/>
+                </a:lnTo>
+                <a:lnTo>
+                  <a:pt x="3170532" y="42033"/>
+                </a:lnTo>
+                <a:lnTo>
+                  <a:pt x="3198102" y="40967"/>
+                </a:lnTo>
+                <a:lnTo>
+                  <a:pt x="3225672" y="39927"/>
+                </a:lnTo>
+                <a:lnTo>
+                  <a:pt x="3253242" y="38911"/>
+                </a:lnTo>
+                <a:lnTo>
+                  <a:pt x="3280812" y="37919"/>
+                </a:lnTo>
+                <a:lnTo>
+                  <a:pt x="3308381" y="36950"/>
+                </a:lnTo>
+                <a:lnTo>
+                  <a:pt x="3335951" y="36004"/>
+                </a:lnTo>
+                <a:lnTo>
+                  <a:pt x="3363521" y="35080"/>
+                </a:lnTo>
+                <a:lnTo>
+                  <a:pt x="3391091" y="34177"/>
+                </a:lnTo>
+                <a:lnTo>
+                  <a:pt x="3418661" y="33295"/>
+                </a:lnTo>
+                <a:lnTo>
+                  <a:pt x="3446231" y="32433"/>
+                </a:lnTo>
+                <a:lnTo>
+                  <a:pt x="3473801" y="31590"/>
+                </a:lnTo>
+                <a:lnTo>
+                  <a:pt x="3501370" y="30767"/>
+                </a:lnTo>
+                <a:lnTo>
+                  <a:pt x="3528940" y="29962"/>
+                </a:lnTo>
+                <a:lnTo>
+                  <a:pt x="3556510" y="29174"/>
+                </a:lnTo>
+                <a:lnTo>
+                  <a:pt x="3584080" y="28404"/>
+                </a:lnTo>
+                <a:lnTo>
+                  <a:pt x="3611650" y="27651"/>
+                </a:lnTo>
+                <a:lnTo>
+                  <a:pt x="3639220" y="26915"/>
+                </a:lnTo>
+                <a:lnTo>
+                  <a:pt x="3666789" y="26195"/>
+                </a:lnTo>
+                <a:lnTo>
+                  <a:pt x="3694359" y="25490"/>
+                </a:lnTo>
+                <a:lnTo>
+                  <a:pt x="3721929" y="24800"/>
+                </a:lnTo>
+                <a:lnTo>
+                  <a:pt x="3749499" y="24125"/>
+                </a:lnTo>
+                <a:lnTo>
+                  <a:pt x="3777069" y="23465"/>
+                </a:lnTo>
+                <a:lnTo>
+                  <a:pt x="3804639" y="22818"/>
+                </a:lnTo>
+                <a:lnTo>
+                  <a:pt x="3832209" y="22185"/>
+                </a:lnTo>
+                <a:lnTo>
+                  <a:pt x="3859778" y="21566"/>
+                </a:lnTo>
+                <a:lnTo>
+                  <a:pt x="3887348" y="20959"/>
+                </a:lnTo>
+                <a:lnTo>
+                  <a:pt x="3914918" y="20365"/>
+                </a:lnTo>
+                <a:lnTo>
+                  <a:pt x="3942488" y="19783"/>
+                </a:lnTo>
+                <a:lnTo>
+                  <a:pt x="3970058" y="19213"/>
+                </a:lnTo>
+                <a:lnTo>
+                  <a:pt x="3997628" y="18655"/>
+                </a:lnTo>
+                <a:lnTo>
+                  <a:pt x="4025197" y="18108"/>
+                </a:lnTo>
+                <a:lnTo>
+                  <a:pt x="4052767" y="17572"/>
+                </a:lnTo>
+                <a:lnTo>
+                  <a:pt x="4080337" y="17047"/>
+                </a:lnTo>
+                <a:lnTo>
+                  <a:pt x="4107907" y="16533"/>
+                </a:lnTo>
+                <a:lnTo>
+                  <a:pt x="4135477" y="16029"/>
+                </a:lnTo>
+                <a:lnTo>
+                  <a:pt x="4163047" y="15534"/>
+                </a:lnTo>
+                <a:lnTo>
+                  <a:pt x="4190617" y="15050"/>
+                </a:lnTo>
+                <a:lnTo>
+                  <a:pt x="4218186" y="14575"/>
+                </a:lnTo>
+                <a:lnTo>
+                  <a:pt x="4245756" y="14109"/>
+                </a:lnTo>
+                <a:lnTo>
+                  <a:pt x="4273326" y="13652"/>
+                </a:lnTo>
+                <a:lnTo>
+                  <a:pt x="4300896" y="13204"/>
+                </a:lnTo>
+                <a:lnTo>
+                  <a:pt x="4328466" y="12765"/>
+                </a:lnTo>
+                <a:lnTo>
+                  <a:pt x="4356036" y="12334"/>
+                </a:lnTo>
+                <a:lnTo>
+                  <a:pt x="4383606" y="11912"/>
+                </a:lnTo>
+                <a:lnTo>
+                  <a:pt x="4411175" y="11497"/>
+                </a:lnTo>
+                <a:lnTo>
+                  <a:pt x="4438745" y="11091"/>
+                </a:lnTo>
+                <a:lnTo>
+                  <a:pt x="4466315" y="10691"/>
+                </a:lnTo>
+                <a:lnTo>
+                  <a:pt x="4493885" y="10300"/>
+                </a:lnTo>
+                <a:lnTo>
+                  <a:pt x="4521455" y="9916"/>
+                </a:lnTo>
+                <a:lnTo>
+                  <a:pt x="4549025" y="9538"/>
+                </a:lnTo>
+                <a:lnTo>
+                  <a:pt x="4576594" y="9168"/>
+                </a:lnTo>
+                <a:lnTo>
+                  <a:pt x="4604164" y="8805"/>
+                </a:lnTo>
+                <a:lnTo>
+                  <a:pt x="4631734" y="8448"/>
+                </a:lnTo>
+                <a:lnTo>
+                  <a:pt x="4659304" y="8098"/>
+                </a:lnTo>
+                <a:lnTo>
+                  <a:pt x="4686874" y="7754"/>
+                </a:lnTo>
+                <a:lnTo>
+                  <a:pt x="4714444" y="7416"/>
+                </a:lnTo>
+                <a:lnTo>
+                  <a:pt x="4742014" y="7084"/>
+                </a:lnTo>
+                <a:lnTo>
+                  <a:pt x="4769583" y="6758"/>
+                </a:lnTo>
+                <a:lnTo>
+                  <a:pt x="4797153" y="6438"/>
+                </a:lnTo>
+                <a:lnTo>
+                  <a:pt x="4824723" y="6124"/>
+                </a:lnTo>
+                <a:lnTo>
+                  <a:pt x="4852293" y="5815"/>
+                </a:lnTo>
+                <a:lnTo>
+                  <a:pt x="4879863" y="5512"/>
+                </a:lnTo>
+                <a:lnTo>
+                  <a:pt x="4907433" y="5214"/>
+                </a:lnTo>
+                <a:lnTo>
+                  <a:pt x="4935003" y="4921"/>
+                </a:lnTo>
+                <a:lnTo>
+                  <a:pt x="4962572" y="4634"/>
+                </a:lnTo>
+                <a:lnTo>
+                  <a:pt x="4990142" y="4351"/>
+                </a:lnTo>
+                <a:lnTo>
+                  <a:pt x="5017712" y="4073"/>
+                </a:lnTo>
+                <a:lnTo>
+                  <a:pt x="5045282" y="3800"/>
+                </a:lnTo>
+                <a:lnTo>
+                  <a:pt x="5072852" y="3531"/>
+                </a:lnTo>
+                <a:lnTo>
+                  <a:pt x="5100422" y="3267"/>
+                </a:lnTo>
+                <a:lnTo>
+                  <a:pt x="5127991" y="3008"/>
+                </a:lnTo>
+                <a:lnTo>
+                  <a:pt x="5155561" y="2753"/>
+                </a:lnTo>
+                <a:lnTo>
+                  <a:pt x="5183131" y="2502"/>
+                </a:lnTo>
+                <a:lnTo>
+                  <a:pt x="5210701" y="2255"/>
+                </a:lnTo>
+                <a:lnTo>
+                  <a:pt x="5238271" y="2012"/>
+                </a:lnTo>
+                <a:lnTo>
+                  <a:pt x="5265841" y="1774"/>
+                </a:lnTo>
+                <a:lnTo>
+                  <a:pt x="5293411" y="1539"/>
+                </a:lnTo>
+                <a:lnTo>
+                  <a:pt x="5320980" y="1308"/>
+                </a:lnTo>
+                <a:lnTo>
+                  <a:pt x="5348550" y="1081"/>
+                </a:lnTo>
+                <a:lnTo>
+                  <a:pt x="5376120" y="858"/>
+                </a:lnTo>
+                <a:lnTo>
+                  <a:pt x="5403690" y="638"/>
+                </a:lnTo>
+                <a:lnTo>
+                  <a:pt x="5431260" y="422"/>
+                </a:lnTo>
+                <a:lnTo>
+                  <a:pt x="5458830" y="210"/>
+                </a:lnTo>
+                <a:lnTo>
+                  <a:pt x="5486400" y="0"/>
+                </a:lnTo>
+              </a:path>
+            </a:pathLst>
+          </a:custGeom>
+          <a:noFill/>
+          <a:ln w="38100">
+            <a:solidFill>
+              <a:srgbClr val="F28BA0"/>
+            </a:solidFill>
+          </a:ln>
+          <a:effectLst/>
+        </p:spPr>
+        <p:txBody>
+          <a:bodyPr rtlCol="0" anchor="ctr"/>
+          <a:lstStyle/>
+          <a:p>
+            <a:pPr algn="ctr"/>
+          </a:p>
+        </p:txBody>
+      </p:sp>
+      <p:sp>
+        <p:nvSpPr>
+          <p:cNvPr id="35" name="A-E09 polygon 33" descr="sci-ppt:o033"/>
+          <p:cNvSpPr/>
+          <p:nvPr/>
+        </p:nvSpPr>
+        <p:spPr>
+          <a:xfrm>
+            <a:off x="914400" y="1586752"/>
+            <a:ext cx="5486400" cy="1067159"/>
+          </a:xfrm>
+          <a:custGeom>
+            <a:avLst/>
+            <a:gdLst/>
+            <a:ahLst/>
+            <a:cxnLst/>
+            <a:rect l="l" t="t" r="r" b="b"/>
+            <a:pathLst>
+              <a:path w="5486400" h="1067159">
+                <a:moveTo>
+                  <a:pt x="0" y="0"/>
+                </a:moveTo>
+                <a:lnTo>
+                  <a:pt x="27569" y="62348"/>
+                </a:lnTo>
+                <a:lnTo>
+                  <a:pt x="55139" y="119969"/>
+                </a:lnTo>
+                <a:lnTo>
+                  <a:pt x="82709" y="173303"/>
+                </a:lnTo>
+                <a:lnTo>
+                  <a:pt x="110279" y="222741"/>
+                </a:lnTo>
+                <a:lnTo>
+                  <a:pt x="137849" y="268634"/>
+                </a:lnTo>
+                <a:lnTo>
+                  <a:pt x="165419" y="311293"/>
+                </a:lnTo>
+                <a:lnTo>
+                  <a:pt x="192988" y="350997"/>
+                </a:lnTo>
+                <a:lnTo>
+                  <a:pt x="220558" y="387999"/>
+                </a:lnTo>
+                <a:lnTo>
+                  <a:pt x="248128" y="422525"/>
+                </a:lnTo>
+                <a:lnTo>
+                  <a:pt x="275698" y="454778"/>
+                </a:lnTo>
+                <a:lnTo>
+                  <a:pt x="303268" y="484942"/>
+                </a:lnTo>
+                <a:lnTo>
+                  <a:pt x="330838" y="513183"/>
+                </a:lnTo>
+                <a:lnTo>
+                  <a:pt x="358408" y="539653"/>
+                </a:lnTo>
+                <a:lnTo>
+                  <a:pt x="385977" y="564488"/>
+                </a:lnTo>
+                <a:lnTo>
+                  <a:pt x="413547" y="587813"/>
+                </a:lnTo>
+                <a:lnTo>
+                  <a:pt x="441117" y="609740"/>
+                </a:lnTo>
+                <a:lnTo>
+                  <a:pt x="468687" y="630373"/>
+                </a:lnTo>
+                <a:lnTo>
+                  <a:pt x="496257" y="649805"/>
+                </a:lnTo>
+                <a:lnTo>
+                  <a:pt x="523827" y="668124"/>
+                </a:lnTo>
+                <a:lnTo>
+                  <a:pt x="551396" y="685406"/>
+                </a:lnTo>
+                <a:lnTo>
+                  <a:pt x="578966" y="701726"/>
+                </a:lnTo>
+                <a:lnTo>
+                  <a:pt x="606536" y="717148"/>
+                </a:lnTo>
+                <a:lnTo>
+                  <a:pt x="634106" y="731734"/>
+                </a:lnTo>
+                <a:lnTo>
+                  <a:pt x="661676" y="745540"/>
+                </a:lnTo>
+                <a:lnTo>
+                  <a:pt x="689246" y="758616"/>
+                </a:lnTo>
+                <a:lnTo>
+                  <a:pt x="716816" y="771012"/>
+                </a:lnTo>
+                <a:lnTo>
+                  <a:pt x="744385" y="782769"/>
+                </a:lnTo>
+                <a:lnTo>
+                  <a:pt x="771955" y="793930"/>
+                </a:lnTo>
+                <a:lnTo>
+                  <a:pt x="799525" y="804531"/>
+                </a:lnTo>
+                <a:lnTo>
+                  <a:pt x="827095" y="814606"/>
+                </a:lnTo>
+                <a:lnTo>
+                  <a:pt x="854665" y="824189"/>
+                </a:lnTo>
+                <a:lnTo>
+                  <a:pt x="882235" y="833309"/>
+                </a:lnTo>
+                <a:lnTo>
+                  <a:pt x="909805" y="841993"/>
+                </a:lnTo>
+                <a:lnTo>
+                  <a:pt x="937374" y="850267"/>
+                </a:lnTo>
+                <a:lnTo>
+                  <a:pt x="964944" y="858156"/>
+                </a:lnTo>
+                <a:lnTo>
+                  <a:pt x="992514" y="865681"/>
+                </a:lnTo>
+                <a:lnTo>
+                  <a:pt x="1020084" y="872862"/>
+                </a:lnTo>
+                <a:lnTo>
+                  <a:pt x="1047654" y="879720"/>
+                </a:lnTo>
+                <a:lnTo>
+                  <a:pt x="1075224" y="886273"/>
+                </a:lnTo>
+                <a:lnTo>
+                  <a:pt x="1102793" y="892537"/>
+                </a:lnTo>
+                <a:lnTo>
+                  <a:pt x="1130363" y="898527"/>
+                </a:lnTo>
+                <a:lnTo>
+                  <a:pt x="1157933" y="904260"/>
+                </a:lnTo>
+                <a:lnTo>
+                  <a:pt x="1185503" y="909747"/>
+                </a:lnTo>
+                <a:lnTo>
+                  <a:pt x="1213073" y="915003"/>
+                </a:lnTo>
+                <a:lnTo>
+                  <a:pt x="1240643" y="920040"/>
+                </a:lnTo>
+                <a:lnTo>
+                  <a:pt x="1268213" y="924868"/>
+                </a:lnTo>
+                <a:lnTo>
+                  <a:pt x="1295782" y="929499"/>
+                </a:lnTo>
+                <a:lnTo>
+                  <a:pt x="1323352" y="933942"/>
+                </a:lnTo>
+                <a:lnTo>
+                  <a:pt x="1350922" y="938207"/>
+                </a:lnTo>
+                <a:lnTo>
+                  <a:pt x="1378492" y="942303"/>
+                </a:lnTo>
+                <a:lnTo>
+                  <a:pt x="1406062" y="946238"/>
+                </a:lnTo>
+                <a:lnTo>
+                  <a:pt x="1433632" y="950019"/>
+                </a:lnTo>
+                <a:lnTo>
+                  <a:pt x="1461202" y="953655"/>
+                </a:lnTo>
+                <a:lnTo>
+                  <a:pt x="1488771" y="957152"/>
+                </a:lnTo>
+                <a:lnTo>
+                  <a:pt x="1516341" y="960517"/>
+                </a:lnTo>
+                <a:lnTo>
+                  <a:pt x="1543911" y="963756"/>
+                </a:lnTo>
+                <a:lnTo>
+                  <a:pt x="1571481" y="966874"/>
+                </a:lnTo>
+                <a:lnTo>
+                  <a:pt x="1599051" y="969878"/>
+                </a:lnTo>
+                <a:lnTo>
+                  <a:pt x="1626621" y="972772"/>
+                </a:lnTo>
+                <a:lnTo>
+                  <a:pt x="1654190" y="975562"/>
+                </a:lnTo>
+                <a:lnTo>
+                  <a:pt x="1681760" y="978252"/>
+                </a:lnTo>
+                <a:lnTo>
+                  <a:pt x="1709330" y="980846"/>
+                </a:lnTo>
+                <a:lnTo>
+                  <a:pt x="1736900" y="983349"/>
+                </a:lnTo>
+                <a:lnTo>
+                  <a:pt x="1764470" y="985765"/>
+                </a:lnTo>
+                <a:lnTo>
+                  <a:pt x="1792040" y="988098"/>
+                </a:lnTo>
+                <a:lnTo>
+                  <a:pt x="1819610" y="990350"/>
+                </a:lnTo>
+                <a:lnTo>
+                  <a:pt x="1847179" y="992526"/>
+                </a:lnTo>
+                <a:lnTo>
+                  <a:pt x="1874749" y="994629"/>
+                </a:lnTo>
+                <a:lnTo>
+                  <a:pt x="1902319" y="996662"/>
+                </a:lnTo>
+                <a:lnTo>
+                  <a:pt x="1929889" y="998627"/>
+                </a:lnTo>
+                <a:lnTo>
+                  <a:pt x="1957459" y="1000528"/>
+                </a:lnTo>
+                <a:lnTo>
+                  <a:pt x="1985029" y="1002366"/>
+                </a:lnTo>
+                <a:lnTo>
+                  <a:pt x="2012598" y="1004146"/>
+                </a:lnTo>
+                <a:lnTo>
+                  <a:pt x="2040168" y="1005868"/>
+                </a:lnTo>
+                <a:lnTo>
+                  <a:pt x="2067738" y="1007535"/>
+                </a:lnTo>
+                <a:lnTo>
+                  <a:pt x="2095308" y="1009150"/>
+                </a:lnTo>
+                <a:lnTo>
+                  <a:pt x="2122878" y="1010714"/>
+                </a:lnTo>
+                <a:lnTo>
+                  <a:pt x="2150448" y="1012230"/>
+                </a:lnTo>
+                <a:lnTo>
+                  <a:pt x="2178018" y="1013699"/>
+                </a:lnTo>
+                <a:lnTo>
+                  <a:pt x="2205587" y="1015123"/>
+                </a:lnTo>
+                <a:lnTo>
+                  <a:pt x="2233157" y="1016504"/>
+                </a:lnTo>
+                <a:lnTo>
+                  <a:pt x="2260727" y="1017843"/>
+                </a:lnTo>
+                <a:lnTo>
+                  <a:pt x="2288297" y="1019142"/>
+                </a:lnTo>
+                <a:lnTo>
+                  <a:pt x="2315867" y="1020403"/>
+                </a:lnTo>
+                <a:lnTo>
+                  <a:pt x="2343437" y="1021626"/>
+                </a:lnTo>
+                <a:lnTo>
+                  <a:pt x="2371007" y="1022814"/>
+                </a:lnTo>
+                <a:lnTo>
+                  <a:pt x="2398576" y="1023967"/>
+                </a:lnTo>
+                <a:lnTo>
+                  <a:pt x="2426146" y="1025087"/>
+                </a:lnTo>
+                <a:lnTo>
+                  <a:pt x="2453716" y="1026175"/>
+                </a:lnTo>
+                <a:lnTo>
+                  <a:pt x="2481286" y="1027232"/>
+                </a:lnTo>
+                <a:lnTo>
+                  <a:pt x="2508856" y="1028259"/>
+                </a:lnTo>
+                <a:lnTo>
+                  <a:pt x="2536426" y="1029257"/>
+                </a:lnTo>
+                <a:lnTo>
+                  <a:pt x="2563995" y="1030228"/>
+                </a:lnTo>
+                <a:lnTo>
+                  <a:pt x="2591565" y="1031172"/>
+                </a:lnTo>
+                <a:lnTo>
+                  <a:pt x="2619135" y="1032089"/>
+                </a:lnTo>
+                <a:lnTo>
+                  <a:pt x="2646705" y="1032982"/>
+                </a:lnTo>
+                <a:lnTo>
+                  <a:pt x="2674275" y="1033851"/>
+                </a:lnTo>
+                <a:lnTo>
+                  <a:pt x="2701845" y="1034696"/>
+                </a:lnTo>
+                <a:lnTo>
+                  <a:pt x="2729415" y="1035519"/>
+                </a:lnTo>
+                <a:lnTo>
+                  <a:pt x="2756984" y="1036320"/>
+                </a:lnTo>
+                <a:lnTo>
+                  <a:pt x="2784554" y="1037100"/>
+                </a:lnTo>
+                <a:lnTo>
+                  <a:pt x="2812124" y="1037859"/>
+                </a:lnTo>
+                <a:lnTo>
+                  <a:pt x="2839694" y="1038599"/>
+                </a:lnTo>
+                <a:lnTo>
+                  <a:pt x="2867264" y="1039319"/>
+                </a:lnTo>
+                <a:lnTo>
+                  <a:pt x="2894834" y="1040021"/>
+                </a:lnTo>
+                <a:lnTo>
+                  <a:pt x="2922404" y="1040705"/>
+                </a:lnTo>
+                <a:lnTo>
+                  <a:pt x="2949973" y="1041372"/>
+                </a:lnTo>
+                <a:lnTo>
+                  <a:pt x="2977543" y="1042022"/>
+                </a:lnTo>
+                <a:lnTo>
+                  <a:pt x="3005113" y="1042655"/>
+                </a:lnTo>
+                <a:lnTo>
+                  <a:pt x="3032683" y="1043273"/>
+                </a:lnTo>
+                <a:lnTo>
+                  <a:pt x="3060253" y="1043876"/>
+                </a:lnTo>
+                <a:lnTo>
+                  <a:pt x="3087823" y="1044464"/>
+                </a:lnTo>
+                <a:lnTo>
+                  <a:pt x="3115392" y="1045037"/>
+                </a:lnTo>
+                <a:lnTo>
+                  <a:pt x="3142962" y="1045597"/>
+                </a:lnTo>
+                <a:lnTo>
+                  <a:pt x="3170532" y="1046143"/>
+                </a:lnTo>
+                <a:lnTo>
+                  <a:pt x="3198102" y="1046676"/>
+                </a:lnTo>
+                <a:lnTo>
+                  <a:pt x="3225672" y="1047196"/>
+                </a:lnTo>
+                <a:lnTo>
+                  <a:pt x="3253242" y="1047704"/>
+                </a:lnTo>
+                <a:lnTo>
+                  <a:pt x="3280812" y="1048200"/>
+                </a:lnTo>
+                <a:lnTo>
+                  <a:pt x="3308381" y="1048684"/>
+                </a:lnTo>
+                <a:lnTo>
+                  <a:pt x="3335951" y="1049157"/>
+                </a:lnTo>
+                <a:lnTo>
+                  <a:pt x="3363521" y="1049619"/>
+                </a:lnTo>
+                <a:lnTo>
+                  <a:pt x="3391091" y="1050071"/>
+                </a:lnTo>
+                <a:lnTo>
+                  <a:pt x="3418661" y="1050512"/>
+                </a:lnTo>
+                <a:lnTo>
+                  <a:pt x="3446231" y="1050943"/>
+                </a:lnTo>
+                <a:lnTo>
+                  <a:pt x="3473801" y="1051364"/>
+                </a:lnTo>
+                <a:lnTo>
+                  <a:pt x="3501370" y="1051776"/>
+                </a:lnTo>
+                <a:lnTo>
+                  <a:pt x="3528940" y="1052178"/>
+                </a:lnTo>
+                <a:lnTo>
+                  <a:pt x="3556510" y="1052572"/>
+                </a:lnTo>
+                <a:lnTo>
+                  <a:pt x="3584080" y="1052957"/>
+                </a:lnTo>
+                <a:lnTo>
+                  <a:pt x="3611650" y="1053333"/>
+                </a:lnTo>
+                <a:lnTo>
+                  <a:pt x="3639220" y="1053702"/>
+                </a:lnTo>
+                <a:lnTo>
+                  <a:pt x="3666789" y="1054062"/>
+                </a:lnTo>
+                <a:lnTo>
+                  <a:pt x="3694359" y="1054414"/>
+                </a:lnTo>
+                <a:lnTo>
+                  <a:pt x="3721929" y="1054759"/>
+                </a:lnTo>
+                <a:lnTo>
+                  <a:pt x="3749499" y="1055097"/>
+                </a:lnTo>
+                <a:lnTo>
+                  <a:pt x="3777069" y="1055427"/>
+                </a:lnTo>
+                <a:lnTo>
+                  <a:pt x="3804639" y="1055750"/>
+                </a:lnTo>
+                <a:lnTo>
+                  <a:pt x="3832209" y="1056067"/>
+                </a:lnTo>
+                <a:lnTo>
+                  <a:pt x="3859778" y="1056376"/>
+                </a:lnTo>
+                <a:lnTo>
+                  <a:pt x="3887348" y="1056680"/>
+                </a:lnTo>
+                <a:lnTo>
+                  <a:pt x="3914918" y="1056977"/>
+                </a:lnTo>
+                <a:lnTo>
+                  <a:pt x="3942488" y="1057268"/>
+                </a:lnTo>
+                <a:lnTo>
+                  <a:pt x="3970058" y="1057553"/>
+                </a:lnTo>
+                <a:lnTo>
+                  <a:pt x="3997628" y="1057832"/>
+                </a:lnTo>
+                <a:lnTo>
+                  <a:pt x="4025197" y="1058105"/>
+                </a:lnTo>
+                <a:lnTo>
+                  <a:pt x="4052767" y="1058373"/>
+                </a:lnTo>
+                <a:lnTo>
+                  <a:pt x="4080337" y="1058636"/>
+                </a:lnTo>
+                <a:lnTo>
+                  <a:pt x="4107907" y="1058893"/>
+                </a:lnTo>
+                <a:lnTo>
+                  <a:pt x="4135477" y="1059145"/>
+                </a:lnTo>
+                <a:lnTo>
+                  <a:pt x="4163047" y="1059392"/>
+                </a:lnTo>
+                <a:lnTo>
+                  <a:pt x="4190617" y="1059634"/>
+                </a:lnTo>
+                <a:lnTo>
+                  <a:pt x="4218186" y="1059872"/>
+                </a:lnTo>
+                <a:lnTo>
+                  <a:pt x="4245756" y="1060105"/>
+                </a:lnTo>
+                <a:lnTo>
+                  <a:pt x="4273326" y="1060333"/>
+                </a:lnTo>
+                <a:lnTo>
+                  <a:pt x="4300896" y="1060557"/>
+                </a:lnTo>
+                <a:lnTo>
+                  <a:pt x="4328466" y="1060777"/>
+                </a:lnTo>
+                <a:lnTo>
+                  <a:pt x="4356036" y="1060992"/>
+                </a:lnTo>
+                <a:lnTo>
+                  <a:pt x="4383606" y="1061203"/>
+                </a:lnTo>
+                <a:lnTo>
+                  <a:pt x="4411175" y="1061411"/>
+                </a:lnTo>
+                <a:lnTo>
+                  <a:pt x="4438745" y="1061614"/>
+                </a:lnTo>
+                <a:lnTo>
+                  <a:pt x="4466315" y="1061813"/>
+                </a:lnTo>
+                <a:lnTo>
+                  <a:pt x="4493885" y="1062009"/>
+                </a:lnTo>
+                <a:lnTo>
+                  <a:pt x="4521455" y="1062201"/>
+                </a:lnTo>
+                <a:lnTo>
+                  <a:pt x="4549025" y="1062390"/>
+                </a:lnTo>
+                <a:lnTo>
+                  <a:pt x="4576594" y="1062575"/>
+                </a:lnTo>
+                <a:lnTo>
+                  <a:pt x="4604164" y="1062757"/>
+                </a:lnTo>
+                <a:lnTo>
+                  <a:pt x="4631734" y="1062935"/>
+                </a:lnTo>
+                <a:lnTo>
+                  <a:pt x="4659304" y="1063110"/>
+                </a:lnTo>
+                <a:lnTo>
+                  <a:pt x="4686874" y="1063282"/>
+                </a:lnTo>
+                <a:lnTo>
+                  <a:pt x="4714444" y="1063451"/>
+                </a:lnTo>
+                <a:lnTo>
+                  <a:pt x="4742014" y="1063617"/>
+                </a:lnTo>
+                <a:lnTo>
+                  <a:pt x="4769583" y="1063780"/>
+                </a:lnTo>
+                <a:lnTo>
+                  <a:pt x="4797153" y="1063940"/>
+                </a:lnTo>
+                <a:lnTo>
+                  <a:pt x="4824723" y="1064097"/>
+                </a:lnTo>
+                <a:lnTo>
+                  <a:pt x="4852293" y="1064251"/>
+                </a:lnTo>
+                <a:lnTo>
+                  <a:pt x="4879863" y="1064403"/>
+                </a:lnTo>
+                <a:lnTo>
+                  <a:pt x="4907433" y="1064552"/>
+                </a:lnTo>
+                <a:lnTo>
+                  <a:pt x="4935003" y="1064699"/>
+                </a:lnTo>
+                <a:lnTo>
+                  <a:pt x="4962572" y="1064842"/>
+                </a:lnTo>
+                <a:lnTo>
+                  <a:pt x="4990142" y="1064984"/>
+                </a:lnTo>
+                <a:lnTo>
+                  <a:pt x="5017712" y="1065123"/>
+                </a:lnTo>
+                <a:lnTo>
+                  <a:pt x="5045282" y="1065259"/>
+                </a:lnTo>
+                <a:lnTo>
+                  <a:pt x="5072852" y="1065394"/>
+                </a:lnTo>
+                <a:lnTo>
+                  <a:pt x="5100422" y="1065526"/>
+                </a:lnTo>
+                <a:lnTo>
+                  <a:pt x="5127991" y="1065655"/>
+                </a:lnTo>
+                <a:lnTo>
+                  <a:pt x="5155561" y="1065783"/>
+                </a:lnTo>
+                <a:lnTo>
+                  <a:pt x="5183131" y="1065908"/>
+                </a:lnTo>
+                <a:lnTo>
+                  <a:pt x="5210701" y="1066032"/>
+                </a:lnTo>
+                <a:lnTo>
+                  <a:pt x="5238271" y="1066153"/>
+                </a:lnTo>
+                <a:lnTo>
+                  <a:pt x="5265841" y="1066272"/>
+                </a:lnTo>
+                <a:lnTo>
+                  <a:pt x="5293411" y="1066390"/>
+                </a:lnTo>
+                <a:lnTo>
+                  <a:pt x="5320980" y="1066505"/>
+                </a:lnTo>
+                <a:lnTo>
+                  <a:pt x="5348550" y="1066618"/>
+                </a:lnTo>
+                <a:lnTo>
+                  <a:pt x="5376120" y="1066730"/>
+                </a:lnTo>
+                <a:lnTo>
+                  <a:pt x="5403690" y="1066840"/>
+                </a:lnTo>
+                <a:lnTo>
+                  <a:pt x="5431260" y="1066948"/>
+                </a:lnTo>
+                <a:lnTo>
+                  <a:pt x="5458830" y="1067054"/>
+                </a:lnTo>
+                <a:lnTo>
+                  <a:pt x="5486400" y="1067159"/>
+                </a:lnTo>
+              </a:path>
+            </a:pathLst>
+          </a:custGeom>
+          <a:noFill/>
+          <a:ln w="38100">
+            <a:solidFill>
+              <a:srgbClr val="8EDBD4"/>
+            </a:solidFill>
+          </a:ln>
+          <a:effectLst/>
+        </p:spPr>
+        <p:txBody>
+          <a:bodyPr rtlCol="0" anchor="ctr"/>
+          <a:lstStyle/>
+          <a:p>
+            <a:pPr algn="ctr"/>
+          </a:p>
+        </p:txBody>
+      </p:sp>
+      <p:sp>
+        <p:nvSpPr>
+          <p:cNvPr id="36" name="A-E09 text 34" descr="sci-ppt:o034"/>
+          <p:cNvSpPr txBox="1"/>
+          <p:nvPr/>
+        </p:nvSpPr>
+        <p:spPr>
+          <a:xfrm>
+            <a:off x="2221991" y="4329952"/>
+            <a:ext cx="2743200" cy="223900"/>
+          </a:xfrm>
+          <a:prstGeom prst="rect">
+            <a:avLst/>
+          </a:prstGeom>
+          <a:noFill/>
+          <a:effectLst/>
+        </p:spPr>
+        <p:txBody>
+          <a:bodyPr wrap="none" lIns="18288" rIns="18288" tIns="18288" bIns="18288" anchor="t">
+            <a:spAutoFit/>
+          </a:bodyPr>
+          <a:lstStyle/>
+          <a:p>
+            <a:pPr algn="l">
+              <a:spcAft>
+                <a:spcPts val="0"/>
+              </a:spcAft>
+            </a:pPr>
+            <a:r>
+              <a:rPr sz="1150" b="0" i="0">
+                <a:solidFill>
+                  <a:srgbClr val="F28BA0"/>
+                </a:solidFill>
+                <a:latin typeface="Arial"/>
+              </a:rPr>
+              <a:t>Dᵣᵣ = −2R²Ṙ/r³  (radial)</a:t>
+            </a:r>
+          </a:p>
+        </p:txBody>
+      </p:sp>
+      <p:sp>
+        <p:nvSpPr>
+          <p:cNvPr id="37" name="A-E09 text 35" descr="sci-ppt:o035"/>
+          <p:cNvSpPr txBox="1"/>
+          <p:nvPr/>
+        </p:nvSpPr>
+        <p:spPr>
+          <a:xfrm>
+            <a:off x="2359152" y="2070847"/>
+            <a:ext cx="3291840" cy="223900"/>
+          </a:xfrm>
+          <a:prstGeom prst="rect">
+            <a:avLst/>
+          </a:prstGeom>
+          <a:noFill/>
+          <a:effectLst/>
+        </p:spPr>
+        <p:txBody>
+          <a:bodyPr wrap="none" lIns="18288" rIns="18288" tIns="18288" bIns="18288" anchor="t">
+            <a:spAutoFit/>
+          </a:bodyPr>
+          <a:lstStyle/>
+          <a:p>
+            <a:pPr algn="l">
+              <a:spcAft>
+                <a:spcPts val="0"/>
+              </a:spcAft>
+            </a:pPr>
+            <a:r>
+              <a:rPr sz="1150" b="0" i="0">
+                <a:solidFill>
+                  <a:srgbClr val="8EDBD4"/>
+                </a:solidFill>
+                <a:latin typeface="Arial"/>
+              </a:rPr>
+              <a:t>D_θθ = Dᵩᵩ = R²Ṙ/r³  (tangential)</a:t>
+            </a:r>
+          </a:p>
+        </p:txBody>
+      </p:sp>
+      <p:cxnSp>
+        <p:nvCxnSpPr>
+          <p:cNvPr id="38" name="A-E09 line 36" descr="sci-ppt:o036"/>
+          <p:cNvCxnSpPr/>
+          <p:nvPr/>
+        </p:nvCxnSpPr>
+        <p:spPr>
+          <a:xfrm>
+            <a:off x="914400" y="2662517"/>
+            <a:ext cx="5486400" cy="0"/>
+          </a:xfrm>
+          <a:prstGeom prst="line">
+            <a:avLst/>
+          </a:prstGeom>
+          <a:ln w="15240">
+            <a:solidFill>
+              <a:srgbClr val="2E4756"/>
+            </a:solidFill>
+          </a:ln>
+          <a:effectLst/>
+        </p:spPr>
+      </p:cxnSp>
+      <p:sp>
+        <p:nvSpPr>
+          <p:cNvPr id="39" name="A-E09 round_rect 37" descr="sci-ppt:o037"/>
+          <p:cNvSpPr/>
+          <p:nvPr/>
+        </p:nvSpPr>
+        <p:spPr>
+          <a:xfrm>
+            <a:off x="6583680" y="1371600"/>
+            <a:ext cx="5257800" cy="3657600"/>
+          </a:xfrm>
+          <a:prstGeom prst="roundRect">
             <a:avLst/>
           </a:prstGeom>
           <a:solidFill>
             <a:srgbClr val="213E4B"/>
           </a:solidFill>
-          <a:ln w="17780">
+          <a:ln w="20320">
             <a:solidFill>
-              <a:srgbClr val="B4C7D2"/>
+              <a:srgbClr val="8EDBD4"/>
             </a:solidFill>
           </a:ln>
           <a:effectLst/>
@@ -3198,40 +5426,16 @@
           </a:p>
         </p:txBody>
       </p:sp>
-      <p:cxnSp>
-        <p:nvCxnSpPr>
-          <p:cNvPr id="5" name="arrow 3" descr="sci-ppt:obj-003"/>
-          <p:cNvCxnSpPr/>
-          <p:nvPr/>
-        </p:nvCxnSpPr>
-        <p:spPr>
-          <a:xfrm>
-            <a:off x="1792224" y="1645920"/>
-            <a:ext cx="329184" cy="0"/>
-          </a:xfrm>
-          <a:prstGeom prst="line">
-            <a:avLst/>
-          </a:prstGeom>
-          <a:ln w="21590">
-            <a:solidFill>
-              <a:srgbClr val="8EDBD4"/>
-            </a:solidFill>
-            <a:headEnd type="none" w="med" len="med"/>
-            <a:tailEnd type="triangle" w="med" len="med"/>
-          </a:ln>
-          <a:effectLst/>
-        </p:spPr>
-      </p:cxnSp>
-      <p:sp>
-        <p:nvSpPr>
-          <p:cNvPr id="6" name="text 4" descr="sci-ppt:obj-004"/>
+      <p:sp>
+        <p:nvSpPr>
+          <p:cNvPr id="40" name="A-E09 text 38" descr="sci-ppt:o038"/>
           <p:cNvSpPr txBox="1"/>
           <p:nvPr/>
         </p:nvSpPr>
         <p:spPr>
           <a:xfrm>
-            <a:off x="1755648" y="1271016"/>
-            <a:ext cx="1097280" cy="310896"/>
+            <a:off x="6693408" y="1426464"/>
+            <a:ext cx="5038344" cy="254889"/>
           </a:xfrm>
           <a:prstGeom prst="rect">
             <a:avLst/>
@@ -3240,7 +5444,7 @@
           <a:effectLst/>
         </p:spPr>
         <p:txBody>
-          <a:bodyPr wrap="none" lIns="0" rIns="0" tIns="0" bIns="0" anchor="ctr">
+          <a:bodyPr wrap="none" lIns="18288" rIns="18288" tIns="18288" bIns="18288" anchor="t">
             <a:spAutoFit/>
           </a:bodyPr>
           <a:lstStyle/>
@@ -3251,51 +5455,67 @@
               </a:spcAft>
             </a:pPr>
             <a:r>
-              <a:rPr sz="1296" b="0" i="0">
+              <a:rPr sz="1350" b="1" i="0">
+                <a:solidFill>
+                  <a:srgbClr val="8EDBD4"/>
+                </a:solidFill>
+                <a:latin typeface="Arial"/>
+              </a:rPr>
+              <a:t>Kelvin–Voigt closure</a:t>
+            </a:r>
+          </a:p>
+        </p:txBody>
+      </p:sp>
+      <p:sp>
+        <p:nvSpPr>
+          <p:cNvPr id="41" name="A-E09 text 39" descr="sci-ppt:o039"/>
+          <p:cNvSpPr txBox="1"/>
+          <p:nvPr/>
+        </p:nvSpPr>
+        <p:spPr>
+          <a:xfrm>
+            <a:off x="6720840" y="1828800"/>
+            <a:ext cx="5029200" cy="239395"/>
+          </a:xfrm>
+          <a:prstGeom prst="rect">
+            <a:avLst/>
+          </a:prstGeom>
+          <a:noFill/>
+          <a:effectLst/>
+        </p:spPr>
+        <p:txBody>
+          <a:bodyPr wrap="none" lIns="18288" rIns="18288" tIns="18288" bIns="18288" anchor="t">
+            <a:spAutoFit/>
+          </a:bodyPr>
+          <a:lstStyle/>
+          <a:p>
+            <a:pPr algn="l">
+              <a:spcAft>
+                <a:spcPts val="0"/>
+              </a:spcAft>
+            </a:pPr>
+            <a:r>
+              <a:rPr sz="1250" b="1" i="0">
                 <a:solidFill>
                   <a:srgbClr val="E7F0F3"/>
                 </a:solidFill>
                 <a:latin typeface="Arial"/>
               </a:rPr>
-              <a:t>Rref</a:t>
-            </a:r>
-          </a:p>
-        </p:txBody>
-      </p:sp>
-      <p:cxnSp>
-        <p:nvCxnSpPr>
-          <p:cNvPr id="7" name="arrow 5" descr="sci-ppt:obj-005"/>
-          <p:cNvCxnSpPr/>
-          <p:nvPr/>
-        </p:nvCxnSpPr>
-        <p:spPr>
-          <a:xfrm>
-            <a:off x="1792224" y="1645920"/>
-            <a:ext cx="517262" cy="517262"/>
-          </a:xfrm>
-          <a:prstGeom prst="line">
-            <a:avLst/>
-          </a:prstGeom>
-          <a:ln w="21590">
-            <a:solidFill>
-              <a:srgbClr val="8EDBD4"/>
-            </a:solidFill>
-            <a:headEnd type="none" w="med" len="med"/>
-            <a:tailEnd type="triangle" w="med" len="med"/>
-          </a:ln>
-          <a:effectLst/>
-        </p:spPr>
-      </p:cxnSp>
-      <p:sp>
-        <p:nvSpPr>
-          <p:cNvPr id="8" name="text 6" descr="sci-ppt:obj-006"/>
+              <a:t>T = T^e + 2η_g D,   uᵣ = R²Ṙ / r²</a:t>
+            </a:r>
+          </a:p>
+        </p:txBody>
+      </p:sp>
+      <p:sp>
+        <p:nvSpPr>
+          <p:cNvPr id="42" name="A-E09 text 40" descr="sci-ppt:o040"/>
           <p:cNvSpPr txBox="1"/>
           <p:nvPr/>
         </p:nvSpPr>
         <p:spPr>
           <a:xfrm>
-            <a:off x="2304288" y="2139696"/>
-            <a:ext cx="822960" cy="310896"/>
+            <a:off x="6720840" y="2377440"/>
+            <a:ext cx="5029200" cy="231648"/>
           </a:xfrm>
           <a:prstGeom prst="rect">
             <a:avLst/>
@@ -3304,7 +5524,7 @@
           <a:effectLst/>
         </p:spPr>
         <p:txBody>
-          <a:bodyPr wrap="none" lIns="0" rIns="0" tIns="0" bIns="0" anchor="ctr">
+          <a:bodyPr wrap="none" lIns="18288" rIns="18288" tIns="18288" bIns="18288" anchor="t">
             <a:spAutoFit/>
           </a:bodyPr>
           <a:lstStyle/>
@@ -3315,113 +5535,163 @@
               </a:spcAft>
             </a:pPr>
             <a:r>
-              <a:rPr sz="1296" b="0" i="0">
+              <a:rPr sz="1200" b="1" i="0">
+                <a:solidFill>
+                  <a:srgbClr val="F2B880"/>
+                </a:solidFill>
+                <a:latin typeface="Arial"/>
+              </a:rPr>
+              <a:t>trace D = −2 + 1 + 1 = 0  (incompressible)</a:t>
+            </a:r>
+          </a:p>
+        </p:txBody>
+      </p:sp>
+      <p:sp>
+        <p:nvSpPr>
+          <p:cNvPr id="43" name="A-E09 text 41" descr="sci-ppt:o041"/>
+          <p:cNvSpPr txBox="1"/>
+          <p:nvPr/>
+        </p:nvSpPr>
+        <p:spPr>
+          <a:xfrm>
+            <a:off x="6720840" y="2926080"/>
+            <a:ext cx="5029200" cy="239395"/>
+          </a:xfrm>
+          <a:prstGeom prst="rect">
+            <a:avLst/>
+          </a:prstGeom>
+          <a:noFill/>
+          <a:effectLst/>
+        </p:spPr>
+        <p:txBody>
+          <a:bodyPr wrap="none" lIns="18288" rIns="18288" tIns="18288" bIns="18288" anchor="t">
+            <a:spAutoFit/>
+          </a:bodyPr>
+          <a:lstStyle/>
+          <a:p>
+            <a:pPr algn="l">
+              <a:spcAft>
+                <a:spcPts val="0"/>
+              </a:spcAft>
+            </a:pPr>
+            <a:r>
+              <a:rPr sz="1250" b="1" i="0">
+                <a:solidFill>
+                  <a:srgbClr val="F2B880"/>
+                </a:solidFill>
+                <a:latin typeface="Arial"/>
+              </a:rPr>
+              <a:t>T_θθ − Tᵣᵣ = (elastic) + 6η_g R²Ṙ / r³</a:t>
+            </a:r>
+          </a:p>
+        </p:txBody>
+      </p:sp>
+      <p:sp>
+        <p:nvSpPr>
+          <p:cNvPr id="44" name="A-E09 text 42" descr="sci-ppt:o042"/>
+          <p:cNvSpPr txBox="1"/>
+          <p:nvPr/>
+        </p:nvSpPr>
+        <p:spPr>
+          <a:xfrm>
+            <a:off x="6720840" y="3566160"/>
+            <a:ext cx="5029200" cy="417576"/>
+          </a:xfrm>
+          <a:prstGeom prst="rect">
+            <a:avLst/>
+          </a:prstGeom>
+          <a:noFill/>
+          <a:effectLst/>
+        </p:spPr>
+        <p:txBody>
+          <a:bodyPr wrap="none" lIns="18288" rIns="18288" tIns="18288" bIns="18288" anchor="t">
+            <a:spAutoFit/>
+          </a:bodyPr>
+          <a:lstStyle/>
+          <a:p>
+            <a:pPr algn="l">
+              <a:spcAft>
+                <a:spcPts val="0"/>
+              </a:spcAft>
+            </a:pPr>
+            <a:r>
+              <a:rPr sz="1200" b="0" i="0">
+                <a:solidFill>
+                  <a:srgbClr val="B4C7D2"/>
+                </a:solidFill>
+                <a:latin typeface="Arial"/>
+              </a:rPr>
+              <a:t>The viscous term follows the strain rate of the medium, not</a:t>
+            </a:r>
+          </a:p>
+          <a:p>
+            <a:pPr algn="l">
+              <a:spcAft>
+                <a:spcPts val="0"/>
+              </a:spcAft>
+            </a:pPr>
+            <a:r>
+              <a:rPr sz="1200" b="0" i="0">
+                <a:solidFill>
+                  <a:srgbClr val="B4C7D2"/>
+                </a:solidFill>
+                <a:latin typeface="Arial"/>
+              </a:rPr>
+              <a:t>the mass of the bubble.</a:t>
+            </a:r>
+          </a:p>
+        </p:txBody>
+      </p:sp>
+      <p:sp>
+        <p:nvSpPr>
+          <p:cNvPr id="45" name="A-E09 text 43" descr="sci-ppt:o043"/>
+          <p:cNvSpPr txBox="1"/>
+          <p:nvPr/>
+        </p:nvSpPr>
+        <p:spPr>
+          <a:xfrm>
+            <a:off x="914400" y="5733288"/>
+            <a:ext cx="10972800" cy="239395"/>
+          </a:xfrm>
+          <a:prstGeom prst="rect">
+            <a:avLst/>
+          </a:prstGeom>
+          <a:noFill/>
+          <a:effectLst/>
+        </p:spPr>
+        <p:txBody>
+          <a:bodyPr wrap="none" lIns="18288" rIns="18288" tIns="18288" bIns="18288" anchor="t">
+            <a:spAutoFit/>
+          </a:bodyPr>
+          <a:lstStyle/>
+          <a:p>
+            <a:pPr algn="l">
+              <a:spcAft>
+                <a:spcPts val="0"/>
+              </a:spcAft>
+            </a:pPr>
+            <a:r>
+              <a:rPr sz="1250" b="0" i="0">
                 <a:solidFill>
                   <a:srgbClr val="E7F0F3"/>
                 </a:solidFill>
                 <a:latin typeface="Arial"/>
               </a:rPr>
-              <a:t>r₀</a:t>
-            </a:r>
-          </a:p>
-        </p:txBody>
-      </p:sp>
-      <p:sp>
-        <p:nvSpPr>
-          <p:cNvPr id="9" name="ellipse 7" descr="sci-ppt:obj-007"/>
-          <p:cNvSpPr/>
-          <p:nvPr/>
-        </p:nvSpPr>
-        <p:spPr>
-          <a:xfrm>
-            <a:off x="4682139" y="750219"/>
-            <a:ext cx="1791401" cy="1791401"/>
-          </a:xfrm>
-          <a:prstGeom prst="ellipse">
-            <a:avLst/>
-          </a:prstGeom>
-          <a:noFill/>
-          <a:ln w="17780">
-            <a:solidFill>
-              <a:srgbClr val="B4C7D2"/>
-            </a:solidFill>
-          </a:ln>
-          <a:effectLst/>
-        </p:spPr>
-        <p:txBody>
-          <a:bodyPr rtlCol="0" anchor="ctr"/>
-          <a:lstStyle/>
-          <a:p>
-            <a:pPr algn="ctr"/>
-          </a:p>
-        </p:txBody>
-      </p:sp>
-      <p:sp>
-        <p:nvSpPr>
-          <p:cNvPr id="10" name="ellipse 8" descr="sci-ppt:obj-008"/>
-          <p:cNvSpPr/>
-          <p:nvPr/>
-        </p:nvSpPr>
-        <p:spPr>
-          <a:xfrm>
-            <a:off x="4864608" y="932688"/>
-            <a:ext cx="1426464" cy="1426464"/>
-          </a:xfrm>
-          <a:prstGeom prst="ellipse">
-            <a:avLst/>
-          </a:prstGeom>
-          <a:solidFill>
-            <a:srgbClr val="213E4B"/>
-          </a:solidFill>
-          <a:ln w="17780">
-            <a:solidFill>
-              <a:srgbClr val="B4C7D2"/>
-            </a:solidFill>
-          </a:ln>
-          <a:effectLst/>
-        </p:spPr>
-        <p:txBody>
-          <a:bodyPr rtlCol="0" anchor="ctr"/>
-          <a:lstStyle/>
-          <a:p>
-            <a:pPr algn="ctr"/>
-          </a:p>
-        </p:txBody>
-      </p:sp>
-      <p:cxnSp>
-        <p:nvCxnSpPr>
-          <p:cNvPr id="11" name="arrow 9" descr="sci-ppt:obj-009"/>
-          <p:cNvCxnSpPr/>
-          <p:nvPr/>
-        </p:nvCxnSpPr>
-        <p:spPr>
-          <a:xfrm>
-            <a:off x="5577840" y="1645920"/>
-            <a:ext cx="713232" cy="0"/>
-          </a:xfrm>
-          <a:prstGeom prst="line">
-            <a:avLst/>
-          </a:prstGeom>
-          <a:ln w="21590">
-            <a:solidFill>
-              <a:srgbClr val="8EDBD4"/>
-            </a:solidFill>
-            <a:headEnd type="none" w="med" len="med"/>
-            <a:tailEnd type="triangle" w="med" len="med"/>
-          </a:ln>
-          <a:effectLst/>
-        </p:spPr>
-      </p:cxnSp>
-      <p:sp>
-        <p:nvSpPr>
-          <p:cNvPr id="12" name="text 10" descr="sci-ppt:obj-010"/>
+              <a:t>Radial strain rate is −2 and tangential +1 in units of Ṙ R²/r³: incompressibility forces the 2 : 1 split.</a:t>
+            </a:r>
+          </a:p>
+        </p:txBody>
+      </p:sp>
+      <p:sp>
+        <p:nvSpPr>
+          <p:cNvPr id="46" name="A-E09 text 44" descr="sci-ppt:o044"/>
           <p:cNvSpPr txBox="1"/>
           <p:nvPr/>
         </p:nvSpPr>
         <p:spPr>
           <a:xfrm>
-            <a:off x="5952744" y="1271016"/>
-            <a:ext cx="640080" cy="310896"/>
+            <a:off x="320040" y="6510528"/>
+            <a:ext cx="11521440" cy="200660"/>
           </a:xfrm>
           <a:prstGeom prst="rect">
             <a:avLst/>
@@ -3430,7 +5700,7 @@
           <a:effectLst/>
         </p:spPr>
         <p:txBody>
-          <a:bodyPr wrap="none" lIns="0" rIns="0" tIns="0" bIns="0" anchor="ctr">
+          <a:bodyPr wrap="none" lIns="18288" rIns="18288" tIns="18288" bIns="18288" anchor="t">
             <a:spAutoFit/>
           </a:bodyPr>
           <a:lstStyle/>
@@ -3441,741 +5711,13 @@
               </a:spcAft>
             </a:pPr>
             <a:r>
-              <a:rPr sz="1296" b="0" i="0">
+              <a:rPr sz="1000" b="0" i="0">
                 <a:solidFill>
-                  <a:srgbClr val="E7F0F3"/>
+                  <a:srgbClr val="B4C7D2"/>
                 </a:solidFill>
                 <a:latin typeface="Arial"/>
               </a:rPr>
-              <a:t>R</a:t>
-            </a:r>
-          </a:p>
-        </p:txBody>
-      </p:sp>
-      <p:cxnSp>
-        <p:nvCxnSpPr>
-          <p:cNvPr id="13" name="arrow 11" descr="sci-ppt:obj-011"/>
-          <p:cNvCxnSpPr/>
-          <p:nvPr/>
-        </p:nvCxnSpPr>
-        <p:spPr>
-          <a:xfrm>
-            <a:off x="5577840" y="1645920"/>
-            <a:ext cx="633355" cy="633355"/>
-          </a:xfrm>
-          <a:prstGeom prst="line">
-            <a:avLst/>
-          </a:prstGeom>
-          <a:ln w="21590">
-            <a:solidFill>
-              <a:srgbClr val="8EDBD4"/>
-            </a:solidFill>
-            <a:headEnd type="none" w="med" len="med"/>
-            <a:tailEnd type="triangle" w="med" len="med"/>
-          </a:ln>
-          <a:effectLst/>
-        </p:spPr>
-      </p:cxnSp>
-      <p:sp>
-        <p:nvSpPr>
-          <p:cNvPr id="14" name="text 12" descr="sci-ppt:obj-012"/>
-          <p:cNvSpPr txBox="1"/>
-          <p:nvPr/>
-        </p:nvSpPr>
-        <p:spPr>
-          <a:xfrm>
-            <a:off x="6373368" y="2231136"/>
-            <a:ext cx="640080" cy="310896"/>
-          </a:xfrm>
-          <a:prstGeom prst="rect">
-            <a:avLst/>
-          </a:prstGeom>
-          <a:noFill/>
-          <a:effectLst/>
-        </p:spPr>
-        <p:txBody>
-          <a:bodyPr wrap="none" lIns="0" rIns="0" tIns="0" bIns="0" anchor="ctr">
-            <a:spAutoFit/>
-          </a:bodyPr>
-          <a:lstStyle/>
-          <a:p>
-            <a:pPr algn="l">
-              <a:spcAft>
-                <a:spcPts val="0"/>
-              </a:spcAft>
-            </a:pPr>
-            <a:r>
-              <a:rPr sz="1296" b="0" i="0">
-                <a:solidFill>
-                  <a:srgbClr val="E7F0F3"/>
-                </a:solidFill>
-                <a:latin typeface="Arial"/>
-              </a:rPr>
-              <a:t>r</a:t>
-            </a:r>
-          </a:p>
-        </p:txBody>
-      </p:sp>
-      <p:cxnSp>
-        <p:nvCxnSpPr>
-          <p:cNvPr id="15" name="arrow 13" descr="sci-ppt:obj-013"/>
-          <p:cNvCxnSpPr/>
-          <p:nvPr/>
-        </p:nvCxnSpPr>
-        <p:spPr>
-          <a:xfrm>
-            <a:off x="2697480" y="1645920"/>
-            <a:ext cx="1691640" cy="0"/>
-          </a:xfrm>
-          <a:prstGeom prst="line">
-            <a:avLst/>
-          </a:prstGeom>
-          <a:ln w="21590">
-            <a:solidFill>
-              <a:srgbClr val="8EDBD4"/>
-            </a:solidFill>
-            <a:headEnd type="none" w="med" len="med"/>
-            <a:tailEnd type="triangle" w="med" len="med"/>
-          </a:ln>
-          <a:effectLst/>
-        </p:spPr>
-      </p:cxnSp>
-      <p:sp>
-        <p:nvSpPr>
-          <p:cNvPr id="16" name="text 14" descr="sci-ppt:obj-014"/>
-          <p:cNvSpPr txBox="1"/>
-          <p:nvPr/>
-        </p:nvSpPr>
-        <p:spPr>
-          <a:xfrm>
-            <a:off x="2834640" y="1143000"/>
-            <a:ext cx="2286000" cy="310896"/>
-          </a:xfrm>
-          <a:prstGeom prst="rect">
-            <a:avLst/>
-          </a:prstGeom>
-          <a:noFill/>
-          <a:effectLst/>
-        </p:spPr>
-        <p:txBody>
-          <a:bodyPr wrap="none" lIns="0" rIns="0" tIns="0" bIns="0" anchor="ctr">
-            <a:spAutoFit/>
-          </a:bodyPr>
-          <a:lstStyle/>
-          <a:p>
-            <a:pPr algn="l">
-              <a:spcAft>
-                <a:spcPts val="0"/>
-              </a:spcAft>
-            </a:pPr>
-            <a:r>
-              <a:rPr sz="1296" b="0" i="0">
-                <a:solidFill>
-                  <a:srgbClr val="E7F0F3"/>
-                </a:solidFill>
-                <a:latin typeface="Arial"/>
-              </a:rPr>
-              <a:t>Material map</a:t>
-            </a:r>
-          </a:p>
-        </p:txBody>
-      </p:sp>
-      <p:sp>
-        <p:nvSpPr>
-          <p:cNvPr id="17" name="text 15" descr="sci-ppt:obj-015"/>
-          <p:cNvSpPr txBox="1"/>
-          <p:nvPr/>
-        </p:nvSpPr>
-        <p:spPr>
-          <a:xfrm>
-            <a:off x="1005840" y="2578608"/>
-            <a:ext cx="2286000" cy="310896"/>
-          </a:xfrm>
-          <a:prstGeom prst="rect">
-            <a:avLst/>
-          </a:prstGeom>
-          <a:noFill/>
-          <a:effectLst/>
-        </p:spPr>
-        <p:txBody>
-          <a:bodyPr wrap="none" lIns="0" rIns="0" tIns="0" bIns="0" anchor="ctr">
-            <a:spAutoFit/>
-          </a:bodyPr>
-          <a:lstStyle/>
-          <a:p>
-            <a:pPr algn="l">
-              <a:spcAft>
-                <a:spcPts val="0"/>
-              </a:spcAft>
-            </a:pPr>
-            <a:r>
-              <a:rPr sz="1296" b="0" i="0">
-                <a:solidFill>
-                  <a:srgbClr val="E7F0F3"/>
-                </a:solidFill>
-                <a:latin typeface="Arial"/>
-              </a:rPr>
-              <a:t>Reference</a:t>
-            </a:r>
-          </a:p>
-        </p:txBody>
-      </p:sp>
-      <p:sp>
-        <p:nvSpPr>
-          <p:cNvPr id="18" name="text 16" descr="sci-ppt:obj-016"/>
-          <p:cNvSpPr txBox="1"/>
-          <p:nvPr/>
-        </p:nvSpPr>
-        <p:spPr>
-          <a:xfrm>
-            <a:off x="4846320" y="2660904"/>
-            <a:ext cx="3383280" cy="310896"/>
-          </a:xfrm>
-          <a:prstGeom prst="rect">
-            <a:avLst/>
-          </a:prstGeom>
-          <a:noFill/>
-          <a:effectLst/>
-        </p:spPr>
-        <p:txBody>
-          <a:bodyPr wrap="none" lIns="0" rIns="0" tIns="0" bIns="0" anchor="ctr">
-            <a:spAutoFit/>
-          </a:bodyPr>
-          <a:lstStyle/>
-          <a:p>
-            <a:pPr algn="l">
-              <a:spcAft>
-                <a:spcPts val="0"/>
-              </a:spcAft>
-            </a:pPr>
-            <a:r>
-              <a:rPr sz="1296" b="0" i="0">
-                <a:solidFill>
-                  <a:srgbClr val="E7F0F3"/>
-                </a:solidFill>
-                <a:latin typeface="Arial"/>
-              </a:rPr>
-              <a:t>Deformed: λr , λθ</a:t>
-            </a:r>
-          </a:p>
-        </p:txBody>
-      </p:sp>
-      <p:sp>
-        <p:nvSpPr>
-          <p:cNvPr id="19" name="text 17" descr="sci-ppt:obj-017"/>
-          <p:cNvSpPr txBox="1"/>
-          <p:nvPr/>
-        </p:nvSpPr>
-        <p:spPr>
-          <a:xfrm>
-            <a:off x="6839712" y="777240"/>
-            <a:ext cx="1645920" cy="310896"/>
-          </a:xfrm>
-          <a:prstGeom prst="rect">
-            <a:avLst/>
-          </a:prstGeom>
-          <a:noFill/>
-          <a:effectLst/>
-        </p:spPr>
-        <p:txBody>
-          <a:bodyPr wrap="none" lIns="0" rIns="0" tIns="0" bIns="0" anchor="ctr">
-            <a:spAutoFit/>
-          </a:bodyPr>
-          <a:lstStyle/>
-          <a:p>
-            <a:pPr algn="l">
-              <a:spcAft>
-                <a:spcPts val="0"/>
-              </a:spcAft>
-            </a:pPr>
-            <a:r>
-              <a:rPr sz="1296" b="0" i="0">
-                <a:solidFill>
-                  <a:srgbClr val="E7F0F3"/>
-                </a:solidFill>
-                <a:latin typeface="Arial"/>
-              </a:rPr>
-              <a:t>Gg , ηg</a:t>
-            </a:r>
-          </a:p>
-        </p:txBody>
-      </p:sp>
-      <p:sp>
-        <p:nvSpPr>
-          <p:cNvPr id="20" name="text 18" descr="sci-ppt:obj-018"/>
-          <p:cNvSpPr txBox="1"/>
-          <p:nvPr/>
-        </p:nvSpPr>
-        <p:spPr>
-          <a:xfrm>
-            <a:off x="6839712" y="1207008"/>
-            <a:ext cx="1828800" cy="310896"/>
-          </a:xfrm>
-          <a:prstGeom prst="rect">
-            <a:avLst/>
-          </a:prstGeom>
-          <a:noFill/>
-          <a:effectLst/>
-        </p:spPr>
-        <p:txBody>
-          <a:bodyPr wrap="none" lIns="0" rIns="0" tIns="0" bIns="0" anchor="ctr">
-            <a:spAutoFit/>
-          </a:bodyPr>
-          <a:lstStyle/>
-          <a:p>
-            <a:pPr algn="l">
-              <a:spcAft>
-                <a:spcPts val="0"/>
-              </a:spcAft>
-            </a:pPr>
-            <a:r>
-              <a:rPr sz="1296" b="0" i="0">
-                <a:solidFill>
-                  <a:srgbClr val="E7F0F3"/>
-                </a:solidFill>
-                <a:latin typeface="Arial"/>
-              </a:rPr>
-              <a:t>σrr , σθθ</a:t>
-            </a:r>
-          </a:p>
-        </p:txBody>
-      </p:sp>
-      <p:sp>
-        <p:nvSpPr>
-          <p:cNvPr id="21" name="text 19" descr="sci-ppt:obj-019"/>
-          <p:cNvSpPr txBox="1"/>
-          <p:nvPr/>
-        </p:nvSpPr>
-        <p:spPr>
-          <a:xfrm>
-            <a:off x="6839712" y="1645920"/>
-            <a:ext cx="1371600" cy="310896"/>
-          </a:xfrm>
-          <a:prstGeom prst="rect">
-            <a:avLst/>
-          </a:prstGeom>
-          <a:noFill/>
-          <a:effectLst/>
-        </p:spPr>
-        <p:txBody>
-          <a:bodyPr wrap="none" lIns="0" rIns="0" tIns="0" bIns="0" anchor="ctr">
-            <a:spAutoFit/>
-          </a:bodyPr>
-          <a:lstStyle/>
-          <a:p>
-            <a:pPr algn="l">
-              <a:spcAft>
-                <a:spcPts val="0"/>
-              </a:spcAft>
-            </a:pPr>
-            <a:r>
-              <a:rPr sz="1296" b="0" i="0">
-                <a:solidFill>
-                  <a:srgbClr val="E7F0F3"/>
-                </a:solidFill>
-                <a:latin typeface="Arial"/>
-              </a:rPr>
-              <a:t>p∞</a:t>
-            </a:r>
-          </a:p>
-        </p:txBody>
-      </p:sp>
-      <p:sp>
-        <p:nvSpPr>
-          <p:cNvPr id="22" name="text 20" descr="sci-ppt:obj-020"/>
-          <p:cNvSpPr txBox="1"/>
-          <p:nvPr/>
-        </p:nvSpPr>
-        <p:spPr>
-          <a:xfrm>
-            <a:off x="5266944" y="1682496"/>
-            <a:ext cx="822960" cy="310896"/>
-          </a:xfrm>
-          <a:prstGeom prst="rect">
-            <a:avLst/>
-          </a:prstGeom>
-          <a:noFill/>
-          <a:effectLst/>
-        </p:spPr>
-        <p:txBody>
-          <a:bodyPr wrap="none" lIns="0" rIns="0" tIns="0" bIns="0" anchor="ctr">
-            <a:spAutoFit/>
-          </a:bodyPr>
-          <a:lstStyle/>
-          <a:p>
-            <a:pPr algn="l">
-              <a:spcAft>
-                <a:spcPts val="0"/>
-              </a:spcAft>
-            </a:pPr>
-            <a:r>
-              <a:rPr sz="1296" b="0" i="0">
-                <a:solidFill>
-                  <a:srgbClr val="E7F0F3"/>
-                </a:solidFill>
-                <a:latin typeface="Arial"/>
-              </a:rPr>
-              <a:t>pb</a:t>
-            </a:r>
-          </a:p>
-        </p:txBody>
-      </p:sp>
-      <p:sp>
-        <p:nvSpPr>
-          <p:cNvPr id="23" name="text 21" descr="sci-ppt:obj-021"/>
-          <p:cNvSpPr txBox="1"/>
-          <p:nvPr/>
-        </p:nvSpPr>
-        <p:spPr>
-          <a:xfrm>
-            <a:off x="868680" y="2990088"/>
-            <a:ext cx="7772400" cy="310896"/>
-          </a:xfrm>
-          <a:prstGeom prst="rect">
-            <a:avLst/>
-          </a:prstGeom>
-          <a:noFill/>
-          <a:effectLst/>
-        </p:spPr>
-        <p:txBody>
-          <a:bodyPr wrap="none" lIns="0" rIns="0" tIns="0" bIns="0" anchor="ctr">
-            <a:spAutoFit/>
-          </a:bodyPr>
-          <a:lstStyle/>
-          <a:p>
-            <a:pPr algn="l">
-              <a:spcAft>
-                <a:spcPts val="0"/>
-              </a:spcAft>
-            </a:pPr>
-            <a:r>
-              <a:rPr sz="1152" b="0" i="0">
-                <a:solidFill>
-                  <a:srgbClr val="E7F0F3"/>
-                </a:solidFill>
-                <a:latin typeface="Arial"/>
-              </a:rPr>
-              <a:t>r₀³ − Rref³ = r³ − R³ ; radial coordinates point outward</a:t>
-            </a:r>
-          </a:p>
-        </p:txBody>
-      </p:sp>
-      <p:sp>
-        <p:nvSpPr>
-          <p:cNvPr id="24" name="text 22" descr="sci-ppt:obj-022"/>
-          <p:cNvSpPr txBox="1"/>
-          <p:nvPr/>
-        </p:nvSpPr>
-        <p:spPr>
-          <a:xfrm>
-            <a:off x="256032" y="3465576"/>
-            <a:ext cx="7315200" cy="310896"/>
-          </a:xfrm>
-          <a:prstGeom prst="rect">
-            <a:avLst/>
-          </a:prstGeom>
-          <a:noFill/>
-          <a:effectLst/>
-        </p:spPr>
-        <p:txBody>
-          <a:bodyPr wrap="none" lIns="0" rIns="0" tIns="0" bIns="0" anchor="ctr">
-            <a:spAutoFit/>
-          </a:bodyPr>
-          <a:lstStyle/>
-          <a:p>
-            <a:pPr algn="l">
-              <a:spcAft>
-                <a:spcPts val="0"/>
-              </a:spcAft>
-            </a:pPr>
-            <a:r>
-              <a:rPr sz="1296" b="0" i="0">
-                <a:solidFill>
-                  <a:srgbClr val="8EDBD4"/>
-                </a:solidFill>
-                <a:latin typeface="Arial"/>
-              </a:rPr>
-              <a:t>Variables and physical limits</a:t>
-            </a:r>
-          </a:p>
-        </p:txBody>
-      </p:sp>
-      <p:sp>
-        <p:nvSpPr>
-          <p:cNvPr id="25" name="text 23" descr="sci-ppt:obj-023"/>
-          <p:cNvSpPr txBox="1"/>
-          <p:nvPr/>
-        </p:nvSpPr>
-        <p:spPr>
-          <a:xfrm>
-            <a:off x="365760" y="3813048"/>
-            <a:ext cx="8412480" cy="310896"/>
-          </a:xfrm>
-          <a:prstGeom prst="rect">
-            <a:avLst/>
-          </a:prstGeom>
-          <a:noFill/>
-          <a:effectLst/>
-        </p:spPr>
-        <p:txBody>
-          <a:bodyPr wrap="none" lIns="0" rIns="0" tIns="0" bIns="0" anchor="ctr">
-            <a:spAutoFit/>
-          </a:bodyPr>
-          <a:lstStyle/>
-          <a:p>
-            <a:pPr algn="l">
-              <a:spcAft>
-                <a:spcPts val="0"/>
-              </a:spcAft>
-            </a:pPr>
-            <a:r>
-              <a:rPr sz="1152" b="0" i="0">
-                <a:solidFill>
-                  <a:srgbClr val="E7F0F3"/>
-                </a:solidFill>
-                <a:latin typeface="Arial"/>
-              </a:rPr>
-              <a:t>• Ṙ: wall material speed</a:t>
-            </a:r>
-          </a:p>
-        </p:txBody>
-      </p:sp>
-      <p:sp>
-        <p:nvSpPr>
-          <p:cNvPr id="26" name="text 24" descr="sci-ppt:obj-024"/>
-          <p:cNvSpPr txBox="1"/>
-          <p:nvPr/>
-        </p:nvSpPr>
-        <p:spPr>
-          <a:xfrm>
-            <a:off x="365760" y="4023360"/>
-            <a:ext cx="8412480" cy="310896"/>
-          </a:xfrm>
-          <a:prstGeom prst="rect">
-            <a:avLst/>
-          </a:prstGeom>
-          <a:noFill/>
-          <a:effectLst/>
-        </p:spPr>
-        <p:txBody>
-          <a:bodyPr wrap="none" lIns="0" rIns="0" tIns="0" bIns="0" anchor="ctr">
-            <a:spAutoFit/>
-          </a:bodyPr>
-          <a:lstStyle/>
-          <a:p>
-            <a:pPr algn="l">
-              <a:spcAft>
-                <a:spcPts val="0"/>
-              </a:spcAft>
-            </a:pPr>
-            <a:r>
-              <a:rPr sz="1152" b="0" i="0">
-                <a:solidFill>
-                  <a:srgbClr val="E7F0F3"/>
-                </a:solidFill>
-                <a:latin typeface="Arial"/>
-              </a:rPr>
-              <a:t>• ur = R²Ṙ/r²</a:t>
-            </a:r>
-          </a:p>
-        </p:txBody>
-      </p:sp>
-      <p:sp>
-        <p:nvSpPr>
-          <p:cNvPr id="27" name="text 25" descr="sci-ppt:obj-025"/>
-          <p:cNvSpPr txBox="1"/>
-          <p:nvPr/>
-        </p:nvSpPr>
-        <p:spPr>
-          <a:xfrm>
-            <a:off x="365760" y="4233672"/>
-            <a:ext cx="8412480" cy="310896"/>
-          </a:xfrm>
-          <a:prstGeom prst="rect">
-            <a:avLst/>
-          </a:prstGeom>
-          <a:noFill/>
-          <a:effectLst/>
-        </p:spPr>
-        <p:txBody>
-          <a:bodyPr wrap="none" lIns="0" rIns="0" tIns="0" bIns="0" anchor="ctr">
-            <a:spAutoFit/>
-          </a:bodyPr>
-          <a:lstStyle/>
-          <a:p>
-            <a:pPr algn="l">
-              <a:spcAft>
-                <a:spcPts val="0"/>
-              </a:spcAft>
-            </a:pPr>
-            <a:r>
-              <a:rPr sz="1152" b="0" i="0">
-                <a:solidFill>
-                  <a:srgbClr val="E7F0F3"/>
-                </a:solidFill>
-                <a:latin typeface="Arial"/>
-              </a:rPr>
-              <a:t>• ηg: viscous network/medium contribution</a:t>
-            </a:r>
-          </a:p>
-        </p:txBody>
-      </p:sp>
-      <p:sp>
-        <p:nvSpPr>
-          <p:cNvPr id="28" name="text 26" descr="sci-ppt:obj-026"/>
-          <p:cNvSpPr txBox="1"/>
-          <p:nvPr/>
-        </p:nvSpPr>
-        <p:spPr>
-          <a:xfrm>
-            <a:off x="365760" y="4443984"/>
-            <a:ext cx="8412480" cy="310896"/>
-          </a:xfrm>
-          <a:prstGeom prst="rect">
-            <a:avLst/>
-          </a:prstGeom>
-          <a:noFill/>
-          <a:effectLst/>
-        </p:spPr>
-        <p:txBody>
-          <a:bodyPr wrap="none" lIns="0" rIns="0" tIns="0" bIns="0" anchor="ctr">
-            <a:spAutoFit/>
-          </a:bodyPr>
-          <a:lstStyle/>
-          <a:p>
-            <a:pPr algn="l">
-              <a:spcAft>
-                <a:spcPts val="0"/>
-              </a:spcAft>
-            </a:pPr>
-            <a:r>
-              <a:rPr sz="1152" b="0" i="0">
-                <a:solidFill>
-                  <a:srgbClr val="E7F0F3"/>
-                </a:solidFill>
-                <a:latin typeface="Arial"/>
-              </a:rPr>
-              <a:t>• Drr, Dθθ, Dφφ</a:t>
-            </a:r>
-          </a:p>
-        </p:txBody>
-      </p:sp>
-      <p:sp>
-        <p:nvSpPr>
-          <p:cNvPr id="29" name="text 27" descr="sci-ppt:obj-027"/>
-          <p:cNvSpPr txBox="1"/>
-          <p:nvPr/>
-        </p:nvSpPr>
-        <p:spPr>
-          <a:xfrm>
-            <a:off x="365760" y="4654296"/>
-            <a:ext cx="8412480" cy="310896"/>
-          </a:xfrm>
-          <a:prstGeom prst="rect">
-            <a:avLst/>
-          </a:prstGeom>
-          <a:noFill/>
-          <a:effectLst/>
-        </p:spPr>
-        <p:txBody>
-          <a:bodyPr wrap="none" lIns="0" rIns="0" tIns="0" bIns="0" anchor="ctr">
-            <a:spAutoFit/>
-          </a:bodyPr>
-          <a:lstStyle/>
-          <a:p>
-            <a:pPr algn="l">
-              <a:spcAft>
-                <a:spcPts val="0"/>
-              </a:spcAft>
-            </a:pPr>
-            <a:r>
-              <a:rPr sz="1152" b="0" i="0">
-                <a:solidFill>
-                  <a:srgbClr val="E7F0F3"/>
-                </a:solidFill>
-                <a:latin typeface="Arial"/>
-              </a:rPr>
-              <a:t>• T, Tᵉ, r, R, t</a:t>
-            </a:r>
-          </a:p>
-        </p:txBody>
-      </p:sp>
-      <p:sp>
-        <p:nvSpPr>
-          <p:cNvPr id="30" name="text 28" descr="sci-ppt:obj-028"/>
-          <p:cNvSpPr txBox="1"/>
-          <p:nvPr/>
-        </p:nvSpPr>
-        <p:spPr>
-          <a:xfrm>
-            <a:off x="365760" y="4864608"/>
-            <a:ext cx="8412480" cy="310896"/>
-          </a:xfrm>
-          <a:prstGeom prst="rect">
-            <a:avLst/>
-          </a:prstGeom>
-          <a:noFill/>
-          <a:effectLst/>
-        </p:spPr>
-        <p:txBody>
-          <a:bodyPr wrap="none" lIns="0" rIns="0" tIns="0" bIns="0" anchor="ctr">
-            <a:spAutoFit/>
-          </a:bodyPr>
-          <a:lstStyle/>
-          <a:p>
-            <a:pPr algn="l">
-              <a:spcAft>
-                <a:spcPts val="0"/>
-              </a:spcAft>
-            </a:pPr>
-            <a:r>
-              <a:rPr sz="1152" b="0" i="0">
-                <a:solidFill>
-                  <a:srgbClr val="E7F0F3"/>
-                </a:solidFill>
-                <a:latin typeface="Arial"/>
-              </a:rPr>
-              <a:t>Dashpot stress follows the velocity gradient</a:t>
-            </a:r>
-          </a:p>
-        </p:txBody>
-      </p:sp>
-      <p:sp>
-        <p:nvSpPr>
-          <p:cNvPr id="31" name="text 29" descr="sci-ppt:obj-029"/>
-          <p:cNvSpPr txBox="1"/>
-          <p:nvPr/>
-        </p:nvSpPr>
-        <p:spPr>
-          <a:xfrm>
-            <a:off x="365760" y="5074920"/>
-            <a:ext cx="8412480" cy="310896"/>
-          </a:xfrm>
-          <a:prstGeom prst="rect">
-            <a:avLst/>
-          </a:prstGeom>
-          <a:noFill/>
-          <a:effectLst/>
-        </p:spPr>
-        <p:txBody>
-          <a:bodyPr wrap="none" lIns="0" rIns="0" tIns="0" bIns="0" anchor="ctr">
-            <a:spAutoFit/>
-          </a:bodyPr>
-          <a:lstStyle/>
-          <a:p>
-            <a:pPr algn="l">
-              <a:spcAft>
-                <a:spcPts val="0"/>
-              </a:spcAft>
-            </a:pPr>
-            <a:r>
-              <a:rPr sz="1152" b="0" i="0">
-                <a:solidFill>
-                  <a:srgbClr val="E7F0F3"/>
-                </a:solidFill>
-                <a:latin typeface="Arial"/>
-              </a:rPr>
-              <a:t>Use one effective viscosity for each represented resistance</a:t>
+              <a:t>Radial kinematics and viscous stress difference of Eq. A-E09.</a:t>
             </a:r>
           </a:p>
         </p:txBody>
